--- a/Mapped Curriculum Lessons/Grade 7/Lesson 16 - Text Length and Lines/Text Length and Lines - Slides.pptx
+++ b/Mapped Curriculum Lessons/Grade 7/Lesson 16 - Text Length and Lines/Text Length and Lines - Slides.pptx
@@ -2,28 +2,28 @@
 <file path=ppt/presentation.xml><?xml version="1.0" encoding="utf-8"?>
 <p:presentation xmlns:p="http://schemas.openxmlformats.org/presentationml/2006/main" embedTrueTypeFonts="1" saveSubsetFonts="0">
   <p:sldMasterIdLst>
-    <p:sldMasterId xmlns:r="http://schemas.openxmlformats.org/officeDocument/2006/relationships" id="2147483648" r:id="R189bfb1887ae4eb5"/>
+    <p:sldMasterId xmlns:r="http://schemas.openxmlformats.org/officeDocument/2006/relationships" id="2147483648" r:id="R48a178523f2e4654"/>
   </p:sldMasterIdLst>
   <p:notesMasterIdLst>
-    <p:notesMasterId xmlns:r="http://schemas.openxmlformats.org/officeDocument/2006/relationships" r:id="Rea539c4d49714320"/>
+    <p:notesMasterId xmlns:r="http://schemas.openxmlformats.org/officeDocument/2006/relationships" r:id="R4ee4e280b5a14929"/>
   </p:notesMasterIdLst>
   <p:sldIdLst>
-    <p:sldId xmlns:r="http://schemas.openxmlformats.org/officeDocument/2006/relationships" id="256" r:id="Ree2835da8d32475c"/>
-    <p:sldId xmlns:r="http://schemas.openxmlformats.org/officeDocument/2006/relationships" id="257" r:id="Rf2b4ec9ac2ed4227"/>
-    <p:sldId xmlns:r="http://schemas.openxmlformats.org/officeDocument/2006/relationships" id="258" r:id="Rec5ef777d82c44a6"/>
-    <p:sldId xmlns:r="http://schemas.openxmlformats.org/officeDocument/2006/relationships" id="259" r:id="R79b6e9aed4ef4318"/>
-    <p:sldId xmlns:r="http://schemas.openxmlformats.org/officeDocument/2006/relationships" id="260" r:id="R55c495537043480a"/>
-    <p:sldId xmlns:r="http://schemas.openxmlformats.org/officeDocument/2006/relationships" id="261" r:id="R3ab6d07ae8424fab"/>
-    <p:sldId xmlns:r="http://schemas.openxmlformats.org/officeDocument/2006/relationships" id="262" r:id="Rd07379424f5949ec"/>
-    <p:sldId xmlns:r="http://schemas.openxmlformats.org/officeDocument/2006/relationships" id="263" r:id="R1837a0e8ce0e4f18"/>
-    <p:sldId xmlns:r="http://schemas.openxmlformats.org/officeDocument/2006/relationships" id="264" r:id="R2e0e5eadff7849f9"/>
+    <p:sldId xmlns:r="http://schemas.openxmlformats.org/officeDocument/2006/relationships" id="256" r:id="R2792163a76274bf4"/>
+    <p:sldId xmlns:r="http://schemas.openxmlformats.org/officeDocument/2006/relationships" id="257" r:id="Rb6735f76d1db4e92"/>
+    <p:sldId xmlns:r="http://schemas.openxmlformats.org/officeDocument/2006/relationships" id="258" r:id="R21ed5fbbf78d4b04"/>
+    <p:sldId xmlns:r="http://schemas.openxmlformats.org/officeDocument/2006/relationships" id="259" r:id="R8cfd474ed6644d88"/>
+    <p:sldId xmlns:r="http://schemas.openxmlformats.org/officeDocument/2006/relationships" id="260" r:id="R721db3afbecb4ee8"/>
+    <p:sldId xmlns:r="http://schemas.openxmlformats.org/officeDocument/2006/relationships" id="261" r:id="Ra65093db73c24319"/>
+    <p:sldId xmlns:r="http://schemas.openxmlformats.org/officeDocument/2006/relationships" id="262" r:id="R93b4593774204c7d"/>
+    <p:sldId xmlns:r="http://schemas.openxmlformats.org/officeDocument/2006/relationships" id="263" r:id="R589083986d9647d6"/>
+    <p:sldId xmlns:r="http://schemas.openxmlformats.org/officeDocument/2006/relationships" id="264" r:id="Rbc947bb1b7a246fb"/>
   </p:sldIdLst>
   <p:sldSz cx="12192000" cy="6858000"/>
   <p:notesSz cx="6858000" cy="9144000"/>
   <p:embeddedFontLst>
     <p:embeddedFont>
       <p:font typeface="JetBrains Mono"/>
-      <p:regular xmlns:r="http://schemas.openxmlformats.org/officeDocument/2006/relationships" r:id="R25f3276f40a64948"/>
+      <p:regular xmlns:r="http://schemas.openxmlformats.org/officeDocument/2006/relationships" r:id="Rf54d32d2b8604687"/>
     </p:embeddedFont>
   </p:embeddedFontLst>
 </p:presentation>
@@ -1071,7 +1071,7 @@
           <p:nvPr/>
         </p:nvPicPr>
         <p:blipFill rotWithShape="1">
-          <a:blip xmlns:r="http://schemas.openxmlformats.org/officeDocument/2006/relationships" xmlns:a="http://schemas.openxmlformats.org/drawingml/2006/main" r:embed="Rf3d4a7c3e06f486e"/>
+          <a:blip xmlns:r="http://schemas.openxmlformats.org/officeDocument/2006/relationships" xmlns:a="http://schemas.openxmlformats.org/drawingml/2006/main" r:embed="R92fe86688ffa4824"/>
           <a:stretch xmlns:a="http://schemas.openxmlformats.org/drawingml/2006/main"/>
         </p:blipFill>
         <p:spPr>
@@ -1451,7 +1451,7 @@
           <p:nvPr/>
         </p:nvPicPr>
         <p:blipFill rotWithShape="1">
-          <a:blip xmlns:r="http://schemas.openxmlformats.org/officeDocument/2006/relationships" xmlns:a="http://schemas.openxmlformats.org/drawingml/2006/main" r:embed="Rc6f4ad0edf074a55">
+          <a:blip xmlns:r="http://schemas.openxmlformats.org/officeDocument/2006/relationships" xmlns:a="http://schemas.openxmlformats.org/drawingml/2006/main" r:embed="Rbf07d75c5ad047a2">
             <a:alphaModFix amt="28000"/>
           </a:blip>
           <a:stretch xmlns:a="http://schemas.openxmlformats.org/drawingml/2006/main"/>
@@ -1664,7 +1664,7 @@
           <p:nvPr/>
         </p:nvPicPr>
         <p:blipFill rotWithShape="1">
-          <a:blip xmlns:r="http://schemas.openxmlformats.org/officeDocument/2006/relationships" xmlns:a="http://schemas.openxmlformats.org/drawingml/2006/main" r:embed="R064fc46435b54df9">
+          <a:blip xmlns:r="http://schemas.openxmlformats.org/officeDocument/2006/relationships" xmlns:a="http://schemas.openxmlformats.org/drawingml/2006/main" r:embed="Rcef24cc12be54c2e">
             <a:alphaModFix amt="28000"/>
           </a:blip>
           <a:stretch xmlns:a="http://schemas.openxmlformats.org/drawingml/2006/main"/>
@@ -1899,7 +1899,7 @@
           <p:nvPr/>
         </p:nvPicPr>
         <p:blipFill rotWithShape="1">
-          <a:blip xmlns:r="http://schemas.openxmlformats.org/officeDocument/2006/relationships" xmlns:a="http://schemas.openxmlformats.org/drawingml/2006/main" r:embed="R3032646e22e3420e">
+          <a:blip xmlns:r="http://schemas.openxmlformats.org/officeDocument/2006/relationships" xmlns:a="http://schemas.openxmlformats.org/drawingml/2006/main" r:embed="R917baf329bbb4073">
             <a:alphaModFix amt="28000"/>
           </a:blip>
           <a:stretch xmlns:a="http://schemas.openxmlformats.org/drawingml/2006/main"/>
@@ -2176,7 +2176,7 @@
           <p:nvPr/>
         </p:nvPicPr>
         <p:blipFill rotWithShape="1">
-          <a:blip xmlns:r="http://schemas.openxmlformats.org/officeDocument/2006/relationships" xmlns:a="http://schemas.openxmlformats.org/drawingml/2006/main" r:embed="R9664fcb8f4c7400f">
+          <a:blip xmlns:r="http://schemas.openxmlformats.org/officeDocument/2006/relationships" xmlns:a="http://schemas.openxmlformats.org/drawingml/2006/main" r:embed="R59d10394981a4ef1">
             <a:alphaModFix amt="28000"/>
           </a:blip>
           <a:stretch xmlns:a="http://schemas.openxmlformats.org/drawingml/2006/main"/>
@@ -2451,7 +2451,7 @@
           <p:nvPr/>
         </p:nvPicPr>
         <p:blipFill rotWithShape="1">
-          <a:blip xmlns:r="http://schemas.openxmlformats.org/officeDocument/2006/relationships" xmlns:a="http://schemas.openxmlformats.org/drawingml/2006/main" r:embed="Rfe428bdc0e604a08">
+          <a:blip xmlns:r="http://schemas.openxmlformats.org/officeDocument/2006/relationships" xmlns:a="http://schemas.openxmlformats.org/drawingml/2006/main" r:embed="Re84756e7fdab4f66">
             <a:alphaModFix amt="28000"/>
           </a:blip>
           <a:stretch xmlns:a="http://schemas.openxmlformats.org/drawingml/2006/main"/>
@@ -2875,7 +2875,7 @@
           <p:nvPr/>
         </p:nvPicPr>
         <p:blipFill rotWithShape="1">
-          <a:blip xmlns:r="http://schemas.openxmlformats.org/officeDocument/2006/relationships" xmlns:a="http://schemas.openxmlformats.org/drawingml/2006/main" r:embed="R98e817a426714eee">
+          <a:blip xmlns:r="http://schemas.openxmlformats.org/officeDocument/2006/relationships" xmlns:a="http://schemas.openxmlformats.org/drawingml/2006/main" r:embed="R31ae826da5204b95">
             <a:alphaModFix amt="28000"/>
           </a:blip>
           <a:stretch xmlns:a="http://schemas.openxmlformats.org/drawingml/2006/main"/>
@@ -3016,7 +3016,7 @@
           <p:nvPr/>
         </p:nvPicPr>
         <p:blipFill rotWithShape="1">
-          <a:blip xmlns:r="http://schemas.openxmlformats.org/officeDocument/2006/relationships" xmlns:a="http://schemas.openxmlformats.org/drawingml/2006/main" r:embed="Rcf21f618b5994810">
+          <a:blip xmlns:r="http://schemas.openxmlformats.org/officeDocument/2006/relationships" xmlns:a="http://schemas.openxmlformats.org/drawingml/2006/main" r:embed="R456554a0f4c64096">
             <a:alphaModFix amt="28000"/>
           </a:blip>
           <a:stretch xmlns:a="http://schemas.openxmlformats.org/drawingml/2006/main"/>
@@ -3130,7 +3130,7 @@
           <p:nvPr/>
         </p:nvPicPr>
         <p:blipFill rotWithShape="1">
-          <a:blip xmlns:r="http://schemas.openxmlformats.org/officeDocument/2006/relationships" xmlns:a="http://schemas.openxmlformats.org/drawingml/2006/main" r:embed="R2d2ef279496842e0">
+          <a:blip xmlns:r="http://schemas.openxmlformats.org/officeDocument/2006/relationships" xmlns:a="http://schemas.openxmlformats.org/drawingml/2006/main" r:embed="R6b245332b91a44fb">
             <a:alphaModFix amt="28000"/>
           </a:blip>
           <a:stretch xmlns:a="http://schemas.openxmlformats.org/drawingml/2006/main"/>
@@ -3457,7 +3457,7 @@
           <p:nvPr/>
         </p:nvPicPr>
         <p:blipFill rotWithShape="1">
-          <a:blip xmlns:r="http://schemas.openxmlformats.org/officeDocument/2006/relationships" xmlns:a="http://schemas.openxmlformats.org/drawingml/2006/main" r:embed="R279bc88169df40ef">
+          <a:blip xmlns:r="http://schemas.openxmlformats.org/officeDocument/2006/relationships" xmlns:a="http://schemas.openxmlformats.org/drawingml/2006/main" r:embed="R0e4f2aa9e2ed4bff">
             <a:alphaModFix amt="28000"/>
           </a:blip>
           <a:stretch xmlns:a="http://schemas.openxmlformats.org/drawingml/2006/main"/>
@@ -3745,7 +3745,7 @@
           <p:nvPr/>
         </p:nvPicPr>
         <p:blipFill rotWithShape="1">
-          <a:blip xmlns:r="http://schemas.openxmlformats.org/officeDocument/2006/relationships" xmlns:a="http://schemas.openxmlformats.org/drawingml/2006/main" r:embed="Ra9306a0bd7ca445a">
+          <a:blip xmlns:r="http://schemas.openxmlformats.org/officeDocument/2006/relationships" xmlns:a="http://schemas.openxmlformats.org/drawingml/2006/main" r:embed="R0b0097253b264536">
             <a:alphaModFix amt="28000"/>
           </a:blip>
           <a:stretch xmlns:a="http://schemas.openxmlformats.org/drawingml/2006/main"/>
@@ -3982,17 +3982,17 @@
   </p:cSld>
   <p:clrMap bg1="lt1" tx1="dk1" bg2="lt2" tx2="dk2" accent1="accent1" accent2="accent2" accent3="accent3" accent4="accent4" accent5="accent5" accent6="accent6" hlink="hlink" folHlink="folHlink"/>
   <p:sldLayoutIdLst>
-    <p:sldLayoutId xmlns:r="http://schemas.openxmlformats.org/officeDocument/2006/relationships" id="2147483649" r:id="R5a5c7b03dbd04f2e"/>
-    <p:sldLayoutId xmlns:r="http://schemas.openxmlformats.org/officeDocument/2006/relationships" id="2147483650" r:id="Re3f1237560224a59"/>
-    <p:sldLayoutId xmlns:r="http://schemas.openxmlformats.org/officeDocument/2006/relationships" id="2147483651" r:id="Rcff799bc86814971"/>
-    <p:sldLayoutId xmlns:r="http://schemas.openxmlformats.org/officeDocument/2006/relationships" id="2147483652" r:id="R0cecd824ad4d4fea"/>
-    <p:sldLayoutId xmlns:r="http://schemas.openxmlformats.org/officeDocument/2006/relationships" id="2147483653" r:id="R200726a799304a64"/>
-    <p:sldLayoutId xmlns:r="http://schemas.openxmlformats.org/officeDocument/2006/relationships" id="2147483654" r:id="Re33e14f241814f10"/>
-    <p:sldLayoutId xmlns:r="http://schemas.openxmlformats.org/officeDocument/2006/relationships" id="2147483655" r:id="R996fe1aae355410e"/>
-    <p:sldLayoutId xmlns:r="http://schemas.openxmlformats.org/officeDocument/2006/relationships" id="2147483656" r:id="R2334388bc6a44868"/>
-    <p:sldLayoutId xmlns:r="http://schemas.openxmlformats.org/officeDocument/2006/relationships" id="2147483657" r:id="R92af0ddbc2d047ae"/>
-    <p:sldLayoutId xmlns:r="http://schemas.openxmlformats.org/officeDocument/2006/relationships" id="2147483658" r:id="R5cdaeed83e9e48d2"/>
-    <p:sldLayoutId xmlns:r="http://schemas.openxmlformats.org/officeDocument/2006/relationships" id="2147483659" r:id="Rd225fae5776a4a2d"/>
+    <p:sldLayoutId xmlns:r="http://schemas.openxmlformats.org/officeDocument/2006/relationships" id="2147483649" r:id="R78bc05959e1a4195"/>
+    <p:sldLayoutId xmlns:r="http://schemas.openxmlformats.org/officeDocument/2006/relationships" id="2147483650" r:id="Ra32d3d99d3fb483e"/>
+    <p:sldLayoutId xmlns:r="http://schemas.openxmlformats.org/officeDocument/2006/relationships" id="2147483651" r:id="R2112b9ecfecb483f"/>
+    <p:sldLayoutId xmlns:r="http://schemas.openxmlformats.org/officeDocument/2006/relationships" id="2147483652" r:id="Rf8da3e13a55e4f24"/>
+    <p:sldLayoutId xmlns:r="http://schemas.openxmlformats.org/officeDocument/2006/relationships" id="2147483653" r:id="R2f6011abb5134a4f"/>
+    <p:sldLayoutId xmlns:r="http://schemas.openxmlformats.org/officeDocument/2006/relationships" id="2147483654" r:id="R591bed9e5a654c31"/>
+    <p:sldLayoutId xmlns:r="http://schemas.openxmlformats.org/officeDocument/2006/relationships" id="2147483655" r:id="Ra49054eed7ed4b4c"/>
+    <p:sldLayoutId xmlns:r="http://schemas.openxmlformats.org/officeDocument/2006/relationships" id="2147483656" r:id="Ra69146d701ef4994"/>
+    <p:sldLayoutId xmlns:r="http://schemas.openxmlformats.org/officeDocument/2006/relationships" id="2147483657" r:id="Raf1a18b5530f4a54"/>
+    <p:sldLayoutId xmlns:r="http://schemas.openxmlformats.org/officeDocument/2006/relationships" id="2147483658" r:id="R72f10e40268a4428"/>
+    <p:sldLayoutId xmlns:r="http://schemas.openxmlformats.org/officeDocument/2006/relationships" id="2147483659" r:id="R0711e87ca15c40bc"/>
   </p:sldLayoutIdLst>
   <p:hf hdr="0" ftr="0" dt="0"/>
   <p:txStyles>

--- a/Mapped Curriculum Lessons/Grade 7/Lesson 16 - Text Length and Lines/Text Length and Lines - Slides.pptx
+++ b/Mapped Curriculum Lessons/Grade 7/Lesson 16 - Text Length and Lines/Text Length and Lines - Slides.pptx
@@ -2,28 +2,28 @@
 <file path=ppt/presentation.xml><?xml version="1.0" encoding="utf-8"?>
 <p:presentation xmlns:p="http://schemas.openxmlformats.org/presentationml/2006/main" embedTrueTypeFonts="1" saveSubsetFonts="0">
   <p:sldMasterIdLst>
-    <p:sldMasterId xmlns:r="http://schemas.openxmlformats.org/officeDocument/2006/relationships" id="2147483648" r:id="R48a178523f2e4654"/>
+    <p:sldMasterId xmlns:r="http://schemas.openxmlformats.org/officeDocument/2006/relationships" id="2147483648" r:id="Rce7f42ef656a4bb5"/>
   </p:sldMasterIdLst>
   <p:notesMasterIdLst>
-    <p:notesMasterId xmlns:r="http://schemas.openxmlformats.org/officeDocument/2006/relationships" r:id="R4ee4e280b5a14929"/>
+    <p:notesMasterId xmlns:r="http://schemas.openxmlformats.org/officeDocument/2006/relationships" r:id="R8cfc3d01c9044ec6"/>
   </p:notesMasterIdLst>
   <p:sldIdLst>
-    <p:sldId xmlns:r="http://schemas.openxmlformats.org/officeDocument/2006/relationships" id="256" r:id="R2792163a76274bf4"/>
-    <p:sldId xmlns:r="http://schemas.openxmlformats.org/officeDocument/2006/relationships" id="257" r:id="Rb6735f76d1db4e92"/>
-    <p:sldId xmlns:r="http://schemas.openxmlformats.org/officeDocument/2006/relationships" id="258" r:id="R21ed5fbbf78d4b04"/>
-    <p:sldId xmlns:r="http://schemas.openxmlformats.org/officeDocument/2006/relationships" id="259" r:id="R8cfd474ed6644d88"/>
-    <p:sldId xmlns:r="http://schemas.openxmlformats.org/officeDocument/2006/relationships" id="260" r:id="R721db3afbecb4ee8"/>
-    <p:sldId xmlns:r="http://schemas.openxmlformats.org/officeDocument/2006/relationships" id="261" r:id="Ra65093db73c24319"/>
-    <p:sldId xmlns:r="http://schemas.openxmlformats.org/officeDocument/2006/relationships" id="262" r:id="R93b4593774204c7d"/>
-    <p:sldId xmlns:r="http://schemas.openxmlformats.org/officeDocument/2006/relationships" id="263" r:id="R589083986d9647d6"/>
-    <p:sldId xmlns:r="http://schemas.openxmlformats.org/officeDocument/2006/relationships" id="264" r:id="Rbc947bb1b7a246fb"/>
+    <p:sldId xmlns:r="http://schemas.openxmlformats.org/officeDocument/2006/relationships" id="256" r:id="R812e7cada6924d63"/>
+    <p:sldId xmlns:r="http://schemas.openxmlformats.org/officeDocument/2006/relationships" id="257" r:id="R5d66a3c7ee0a47e4"/>
+    <p:sldId xmlns:r="http://schemas.openxmlformats.org/officeDocument/2006/relationships" id="258" r:id="Rea247b5c601d448c"/>
+    <p:sldId xmlns:r="http://schemas.openxmlformats.org/officeDocument/2006/relationships" id="259" r:id="R3e46cea261c84bfe"/>
+    <p:sldId xmlns:r="http://schemas.openxmlformats.org/officeDocument/2006/relationships" id="260" r:id="R332e9902d41245e3"/>
+    <p:sldId xmlns:r="http://schemas.openxmlformats.org/officeDocument/2006/relationships" id="261" r:id="Rb0b00e2ae2d54773"/>
+    <p:sldId xmlns:r="http://schemas.openxmlformats.org/officeDocument/2006/relationships" id="262" r:id="R53198191dbd94ee1"/>
+    <p:sldId xmlns:r="http://schemas.openxmlformats.org/officeDocument/2006/relationships" id="263" r:id="R3cd162917ebc45c4"/>
+    <p:sldId xmlns:r="http://schemas.openxmlformats.org/officeDocument/2006/relationships" id="264" r:id="Rb5178f8121124d6d"/>
   </p:sldIdLst>
   <p:sldSz cx="12192000" cy="6858000"/>
   <p:notesSz cx="6858000" cy="9144000"/>
   <p:embeddedFontLst>
     <p:embeddedFont>
       <p:font typeface="JetBrains Mono"/>
-      <p:regular xmlns:r="http://schemas.openxmlformats.org/officeDocument/2006/relationships" r:id="Rf54d32d2b8604687"/>
+      <p:regular xmlns:r="http://schemas.openxmlformats.org/officeDocument/2006/relationships" r:id="Rae248dbc2036412d"/>
     </p:embeddedFont>
   </p:embeddedFontLst>
 </p:presentation>
@@ -1071,7 +1071,7 @@
           <p:nvPr/>
         </p:nvPicPr>
         <p:blipFill rotWithShape="1">
-          <a:blip xmlns:r="http://schemas.openxmlformats.org/officeDocument/2006/relationships" xmlns:a="http://schemas.openxmlformats.org/drawingml/2006/main" r:embed="R92fe86688ffa4824"/>
+          <a:blip xmlns:r="http://schemas.openxmlformats.org/officeDocument/2006/relationships" xmlns:a="http://schemas.openxmlformats.org/drawingml/2006/main" r:embed="Rcd6c92896ff44aa0"/>
           <a:stretch xmlns:a="http://schemas.openxmlformats.org/drawingml/2006/main"/>
         </p:blipFill>
         <p:spPr>
@@ -1451,7 +1451,7 @@
           <p:nvPr/>
         </p:nvPicPr>
         <p:blipFill rotWithShape="1">
-          <a:blip xmlns:r="http://schemas.openxmlformats.org/officeDocument/2006/relationships" xmlns:a="http://schemas.openxmlformats.org/drawingml/2006/main" r:embed="Rbf07d75c5ad047a2">
+          <a:blip xmlns:r="http://schemas.openxmlformats.org/officeDocument/2006/relationships" xmlns:a="http://schemas.openxmlformats.org/drawingml/2006/main" r:embed="R3b6bc86ba2b34684">
             <a:alphaModFix amt="28000"/>
           </a:blip>
           <a:stretch xmlns:a="http://schemas.openxmlformats.org/drawingml/2006/main"/>
@@ -1664,7 +1664,7 @@
           <p:nvPr/>
         </p:nvPicPr>
         <p:blipFill rotWithShape="1">
-          <a:blip xmlns:r="http://schemas.openxmlformats.org/officeDocument/2006/relationships" xmlns:a="http://schemas.openxmlformats.org/drawingml/2006/main" r:embed="Rcef24cc12be54c2e">
+          <a:blip xmlns:r="http://schemas.openxmlformats.org/officeDocument/2006/relationships" xmlns:a="http://schemas.openxmlformats.org/drawingml/2006/main" r:embed="R96fa00b3ab864dac">
             <a:alphaModFix amt="28000"/>
           </a:blip>
           <a:stretch xmlns:a="http://schemas.openxmlformats.org/drawingml/2006/main"/>
@@ -1899,7 +1899,7 @@
           <p:nvPr/>
         </p:nvPicPr>
         <p:blipFill rotWithShape="1">
-          <a:blip xmlns:r="http://schemas.openxmlformats.org/officeDocument/2006/relationships" xmlns:a="http://schemas.openxmlformats.org/drawingml/2006/main" r:embed="R917baf329bbb4073">
+          <a:blip xmlns:r="http://schemas.openxmlformats.org/officeDocument/2006/relationships" xmlns:a="http://schemas.openxmlformats.org/drawingml/2006/main" r:embed="R4591736a17cc4d6c">
             <a:alphaModFix amt="28000"/>
           </a:blip>
           <a:stretch xmlns:a="http://schemas.openxmlformats.org/drawingml/2006/main"/>
@@ -2176,7 +2176,7 @@
           <p:nvPr/>
         </p:nvPicPr>
         <p:blipFill rotWithShape="1">
-          <a:blip xmlns:r="http://schemas.openxmlformats.org/officeDocument/2006/relationships" xmlns:a="http://schemas.openxmlformats.org/drawingml/2006/main" r:embed="R59d10394981a4ef1">
+          <a:blip xmlns:r="http://schemas.openxmlformats.org/officeDocument/2006/relationships" xmlns:a="http://schemas.openxmlformats.org/drawingml/2006/main" r:embed="Ra47dd1126406485e">
             <a:alphaModFix amt="28000"/>
           </a:blip>
           <a:stretch xmlns:a="http://schemas.openxmlformats.org/drawingml/2006/main"/>
@@ -2451,7 +2451,7 @@
           <p:nvPr/>
         </p:nvPicPr>
         <p:blipFill rotWithShape="1">
-          <a:blip xmlns:r="http://schemas.openxmlformats.org/officeDocument/2006/relationships" xmlns:a="http://schemas.openxmlformats.org/drawingml/2006/main" r:embed="Re84756e7fdab4f66">
+          <a:blip xmlns:r="http://schemas.openxmlformats.org/officeDocument/2006/relationships" xmlns:a="http://schemas.openxmlformats.org/drawingml/2006/main" r:embed="R9215bc23792c4b3b">
             <a:alphaModFix amt="28000"/>
           </a:blip>
           <a:stretch xmlns:a="http://schemas.openxmlformats.org/drawingml/2006/main"/>
@@ -2875,7 +2875,7 @@
           <p:nvPr/>
         </p:nvPicPr>
         <p:blipFill rotWithShape="1">
-          <a:blip xmlns:r="http://schemas.openxmlformats.org/officeDocument/2006/relationships" xmlns:a="http://schemas.openxmlformats.org/drawingml/2006/main" r:embed="R31ae826da5204b95">
+          <a:blip xmlns:r="http://schemas.openxmlformats.org/officeDocument/2006/relationships" xmlns:a="http://schemas.openxmlformats.org/drawingml/2006/main" r:embed="R1967237256c946dc">
             <a:alphaModFix amt="28000"/>
           </a:blip>
           <a:stretch xmlns:a="http://schemas.openxmlformats.org/drawingml/2006/main"/>
@@ -3016,7 +3016,7 @@
           <p:nvPr/>
         </p:nvPicPr>
         <p:blipFill rotWithShape="1">
-          <a:blip xmlns:r="http://schemas.openxmlformats.org/officeDocument/2006/relationships" xmlns:a="http://schemas.openxmlformats.org/drawingml/2006/main" r:embed="R456554a0f4c64096">
+          <a:blip xmlns:r="http://schemas.openxmlformats.org/officeDocument/2006/relationships" xmlns:a="http://schemas.openxmlformats.org/drawingml/2006/main" r:embed="R81f7b5192ca44a73">
             <a:alphaModFix amt="28000"/>
           </a:blip>
           <a:stretch xmlns:a="http://schemas.openxmlformats.org/drawingml/2006/main"/>
@@ -3130,7 +3130,7 @@
           <p:nvPr/>
         </p:nvPicPr>
         <p:blipFill rotWithShape="1">
-          <a:blip xmlns:r="http://schemas.openxmlformats.org/officeDocument/2006/relationships" xmlns:a="http://schemas.openxmlformats.org/drawingml/2006/main" r:embed="R6b245332b91a44fb">
+          <a:blip xmlns:r="http://schemas.openxmlformats.org/officeDocument/2006/relationships" xmlns:a="http://schemas.openxmlformats.org/drawingml/2006/main" r:embed="Ree3410684a9147d9">
             <a:alphaModFix amt="28000"/>
           </a:blip>
           <a:stretch xmlns:a="http://schemas.openxmlformats.org/drawingml/2006/main"/>
@@ -3457,7 +3457,7 @@
           <p:nvPr/>
         </p:nvPicPr>
         <p:blipFill rotWithShape="1">
-          <a:blip xmlns:r="http://schemas.openxmlformats.org/officeDocument/2006/relationships" xmlns:a="http://schemas.openxmlformats.org/drawingml/2006/main" r:embed="R0e4f2aa9e2ed4bff">
+          <a:blip xmlns:r="http://schemas.openxmlformats.org/officeDocument/2006/relationships" xmlns:a="http://schemas.openxmlformats.org/drawingml/2006/main" r:embed="Rb66acc78f5c44032">
             <a:alphaModFix amt="28000"/>
           </a:blip>
           <a:stretch xmlns:a="http://schemas.openxmlformats.org/drawingml/2006/main"/>
@@ -3745,7 +3745,7 @@
           <p:nvPr/>
         </p:nvPicPr>
         <p:blipFill rotWithShape="1">
-          <a:blip xmlns:r="http://schemas.openxmlformats.org/officeDocument/2006/relationships" xmlns:a="http://schemas.openxmlformats.org/drawingml/2006/main" r:embed="R0b0097253b264536">
+          <a:blip xmlns:r="http://schemas.openxmlformats.org/officeDocument/2006/relationships" xmlns:a="http://schemas.openxmlformats.org/drawingml/2006/main" r:embed="Rc91977902bea4990">
             <a:alphaModFix amt="28000"/>
           </a:blip>
           <a:stretch xmlns:a="http://schemas.openxmlformats.org/drawingml/2006/main"/>
@@ -3982,17 +3982,17 @@
   </p:cSld>
   <p:clrMap bg1="lt1" tx1="dk1" bg2="lt2" tx2="dk2" accent1="accent1" accent2="accent2" accent3="accent3" accent4="accent4" accent5="accent5" accent6="accent6" hlink="hlink" folHlink="folHlink"/>
   <p:sldLayoutIdLst>
-    <p:sldLayoutId xmlns:r="http://schemas.openxmlformats.org/officeDocument/2006/relationships" id="2147483649" r:id="R78bc05959e1a4195"/>
-    <p:sldLayoutId xmlns:r="http://schemas.openxmlformats.org/officeDocument/2006/relationships" id="2147483650" r:id="Ra32d3d99d3fb483e"/>
-    <p:sldLayoutId xmlns:r="http://schemas.openxmlformats.org/officeDocument/2006/relationships" id="2147483651" r:id="R2112b9ecfecb483f"/>
-    <p:sldLayoutId xmlns:r="http://schemas.openxmlformats.org/officeDocument/2006/relationships" id="2147483652" r:id="Rf8da3e13a55e4f24"/>
-    <p:sldLayoutId xmlns:r="http://schemas.openxmlformats.org/officeDocument/2006/relationships" id="2147483653" r:id="R2f6011abb5134a4f"/>
-    <p:sldLayoutId xmlns:r="http://schemas.openxmlformats.org/officeDocument/2006/relationships" id="2147483654" r:id="R591bed9e5a654c31"/>
-    <p:sldLayoutId xmlns:r="http://schemas.openxmlformats.org/officeDocument/2006/relationships" id="2147483655" r:id="Ra49054eed7ed4b4c"/>
-    <p:sldLayoutId xmlns:r="http://schemas.openxmlformats.org/officeDocument/2006/relationships" id="2147483656" r:id="Ra69146d701ef4994"/>
-    <p:sldLayoutId xmlns:r="http://schemas.openxmlformats.org/officeDocument/2006/relationships" id="2147483657" r:id="Raf1a18b5530f4a54"/>
-    <p:sldLayoutId xmlns:r="http://schemas.openxmlformats.org/officeDocument/2006/relationships" id="2147483658" r:id="R72f10e40268a4428"/>
-    <p:sldLayoutId xmlns:r="http://schemas.openxmlformats.org/officeDocument/2006/relationships" id="2147483659" r:id="R0711e87ca15c40bc"/>
+    <p:sldLayoutId xmlns:r="http://schemas.openxmlformats.org/officeDocument/2006/relationships" id="2147483649" r:id="R3ef64334872043e2"/>
+    <p:sldLayoutId xmlns:r="http://schemas.openxmlformats.org/officeDocument/2006/relationships" id="2147483650" r:id="Rd77d7780649d4549"/>
+    <p:sldLayoutId xmlns:r="http://schemas.openxmlformats.org/officeDocument/2006/relationships" id="2147483651" r:id="R72981a06c9bd45fd"/>
+    <p:sldLayoutId xmlns:r="http://schemas.openxmlformats.org/officeDocument/2006/relationships" id="2147483652" r:id="R2b109fdcc307412f"/>
+    <p:sldLayoutId xmlns:r="http://schemas.openxmlformats.org/officeDocument/2006/relationships" id="2147483653" r:id="R849ad96be454488b"/>
+    <p:sldLayoutId xmlns:r="http://schemas.openxmlformats.org/officeDocument/2006/relationships" id="2147483654" r:id="R13e6250d50394ee2"/>
+    <p:sldLayoutId xmlns:r="http://schemas.openxmlformats.org/officeDocument/2006/relationships" id="2147483655" r:id="R8a57a19f013341fb"/>
+    <p:sldLayoutId xmlns:r="http://schemas.openxmlformats.org/officeDocument/2006/relationships" id="2147483656" r:id="R1a1442d72c0148d7"/>
+    <p:sldLayoutId xmlns:r="http://schemas.openxmlformats.org/officeDocument/2006/relationships" id="2147483657" r:id="R3d6ee40f182d402c"/>
+    <p:sldLayoutId xmlns:r="http://schemas.openxmlformats.org/officeDocument/2006/relationships" id="2147483658" r:id="R3facc4317b8a46de"/>
+    <p:sldLayoutId xmlns:r="http://schemas.openxmlformats.org/officeDocument/2006/relationships" id="2147483659" r:id="R7f403cfea44349aa"/>
   </p:sldLayoutIdLst>
   <p:hf hdr="0" ftr="0" dt="0"/>
   <p:txStyles>
@@ -6897,18 +6897,18 @@
                 <a:ea typeface="Calibri"/>
                 <a:cs typeface="Calibri"/>
               </a:rPr>
-              <a:t>Remove spaces from the start and end of [message] before displaying and counting it. Test </a:t>
+              <a:t>Use </a:t>
             </a:r>
             <a:r>
               <a:rPr sz="2400" b="0">
                 <a:solidFill>
-                  <a:srgbClr val="067D17"/>
-                </a:solidFill>
-                <a:latin typeface="JetBrains Mono"/>
-                <a:ea typeface="JetBrains Mono"/>
-                <a:cs typeface="JetBrains Mono"/>
-              </a:rPr>
-              <a:t>"Code now"</a:t>
+                  <a:srgbClr val="1750EB"/>
+                </a:solidFill>
+                <a:latin typeface="JetBrains Mono"/>
+                <a:ea typeface="JetBrains Mono"/>
+                <a:cs typeface="JetBrains Mono"/>
+              </a:rPr>
+              <a:t>strip()</a:t>
             </a:r>
             <a:r>
               <a:rPr sz="2400" b="0">
@@ -6919,18 +6919,18 @@
                 <a:ea typeface="Calibri"/>
                 <a:cs typeface="Calibri"/>
               </a:rPr>
-              <a:t> with two spaces before and after it; the message should display as </a:t>
+              <a:t> to remove spaces from the start and end of [message] before using </a:t>
             </a:r>
             <a:r>
               <a:rPr sz="2400" b="0">
                 <a:solidFill>
-                  <a:srgbClr val="067D17"/>
-                </a:solidFill>
-                <a:latin typeface="JetBrains Mono"/>
-                <a:ea typeface="JetBrains Mono"/>
-                <a:cs typeface="JetBrains Mono"/>
-              </a:rPr>
-              <a:t>"Code now"</a:t>
+                  <a:srgbClr val="1750EB"/>
+                </a:solidFill>
+                <a:latin typeface="JetBrains Mono"/>
+                <a:ea typeface="JetBrains Mono"/>
+                <a:cs typeface="JetBrains Mono"/>
+              </a:rPr>
+              <a:t>len()</a:t>
             </a:r>
             <a:r>
               <a:rPr sz="2400" b="0">
@@ -6941,7 +6941,73 @@
                 <a:ea typeface="Calibri"/>
                 <a:cs typeface="Calibri"/>
               </a:rPr>
-              <a:t> and the count should be 8.</a:t>
+              <a:t>. Store the new length in [character_count]. Test </a:t>
+            </a:r>
+            <a:r>
+              <a:rPr sz="2400" b="0">
+                <a:solidFill>
+                  <a:srgbClr val="067D17"/>
+                </a:solidFill>
+                <a:latin typeface="JetBrains Mono"/>
+                <a:ea typeface="JetBrains Mono"/>
+                <a:cs typeface="JetBrains Mono"/>
+              </a:rPr>
+              <a:t>"  Code now  "</a:t>
+            </a:r>
+            <a:r>
+              <a:rPr sz="2400" b="0">
+                <a:solidFill>
+                  <a:srgbClr val="080808"/>
+                </a:solidFill>
+                <a:latin typeface="Calibri"/>
+                <a:ea typeface="Calibri"/>
+                <a:cs typeface="Calibri"/>
+              </a:rPr>
+              <a:t>; display </a:t>
+            </a:r>
+            <a:r>
+              <a:rPr sz="2400" b="0">
+                <a:solidFill>
+                  <a:srgbClr val="067D17"/>
+                </a:solidFill>
+                <a:latin typeface="JetBrains Mono"/>
+                <a:ea typeface="JetBrains Mono"/>
+                <a:cs typeface="JetBrains Mono"/>
+              </a:rPr>
+              <a:t>"Code now"</a:t>
+            </a:r>
+            <a:r>
+              <a:rPr sz="2400" b="0">
+                <a:solidFill>
+                  <a:srgbClr val="080808"/>
+                </a:solidFill>
+                <a:latin typeface="Calibri"/>
+                <a:ea typeface="Calibri"/>
+                <a:cs typeface="Calibri"/>
+              </a:rPr>
+              <a:t> on the message line and </a:t>
+            </a:r>
+            <a:r>
+              <a:rPr sz="2400" b="0">
+                <a:solidFill>
+                  <a:srgbClr val="067D17"/>
+                </a:solidFill>
+                <a:latin typeface="JetBrains Mono"/>
+                <a:ea typeface="JetBrains Mono"/>
+                <a:cs typeface="JetBrains Mono"/>
+              </a:rPr>
+              <a:t>"Characters: 8"</a:t>
+            </a:r>
+            <a:r>
+              <a:rPr sz="2400" b="0">
+                <a:solidFill>
+                  <a:srgbClr val="080808"/>
+                </a:solidFill>
+                <a:latin typeface="Calibri"/>
+                <a:ea typeface="Calibri"/>
+                <a:cs typeface="Calibri"/>
+              </a:rPr>
+              <a:t> on the final line.</a:t>
             </a:r>
           </a:p>
         </p:txBody>
@@ -7522,7 +7588,117 @@
                 <a:ea typeface="Calibri"/>
                 <a:cs typeface="Calibri"/>
               </a:rPr>
-              <a:t>Collect a title and a subtitle. Display both on separate lines, then display a labelled character count for each one.</a:t>
+              <a:t>Ask for a title and store it in [title]. Ask for a subtitle and store it in [subtitle]. Display the title and subtitle on separate lines, followed by a labelled </a:t>
+            </a:r>
+            <a:r>
+              <a:rPr sz="2400" b="0">
+                <a:solidFill>
+                  <a:srgbClr val="1750EB"/>
+                </a:solidFill>
+                <a:latin typeface="JetBrains Mono"/>
+                <a:ea typeface="JetBrains Mono"/>
+                <a:cs typeface="JetBrains Mono"/>
+              </a:rPr>
+              <a:t>len()</a:t>
+            </a:r>
+            <a:r>
+              <a:rPr sz="2400" b="0">
+                <a:solidFill>
+                  <a:srgbClr val="080808"/>
+                </a:solidFill>
+                <a:latin typeface="Calibri"/>
+                <a:ea typeface="Calibri"/>
+                <a:cs typeface="Calibri"/>
+              </a:rPr>
+              <a:t> result for each one. Test </a:t>
+            </a:r>
+            <a:r>
+              <a:rPr sz="2400" b="0">
+                <a:solidFill>
+                  <a:srgbClr val="067D17"/>
+                </a:solidFill>
+                <a:latin typeface="JetBrains Mono"/>
+                <a:ea typeface="JetBrains Mono"/>
+                <a:cs typeface="JetBrains Mono"/>
+              </a:rPr>
+              <a:t>"Code Club"</a:t>
+            </a:r>
+            <a:r>
+              <a:rPr sz="2400" b="0">
+                <a:solidFill>
+                  <a:srgbClr val="080808"/>
+                </a:solidFill>
+                <a:latin typeface="Calibri"/>
+                <a:ea typeface="Calibri"/>
+                <a:cs typeface="Calibri"/>
+              </a:rPr>
+              <a:t> and </a:t>
+            </a:r>
+            <a:r>
+              <a:rPr sz="2400" b="0">
+                <a:solidFill>
+                  <a:srgbClr val="067D17"/>
+                </a:solidFill>
+                <a:latin typeface="JetBrains Mono"/>
+                <a:ea typeface="JetBrains Mono"/>
+                <a:cs typeface="JetBrains Mono"/>
+              </a:rPr>
+              <a:t>"Join today"</a:t>
+            </a:r>
+            <a:r>
+              <a:rPr sz="2400" b="0">
+                <a:solidFill>
+                  <a:srgbClr val="080808"/>
+                </a:solidFill>
+                <a:latin typeface="Calibri"/>
+                <a:ea typeface="Calibri"/>
+                <a:cs typeface="Calibri"/>
+              </a:rPr>
+              <a:t>; display </a:t>
+            </a:r>
+            <a:r>
+              <a:rPr sz="2400" b="0">
+                <a:solidFill>
+                  <a:srgbClr val="067D17"/>
+                </a:solidFill>
+                <a:latin typeface="JetBrains Mono"/>
+                <a:ea typeface="JetBrains Mono"/>
+                <a:cs typeface="JetBrains Mono"/>
+              </a:rPr>
+              <a:t>"Title characters: 9"</a:t>
+            </a:r>
+            <a:r>
+              <a:rPr sz="2400" b="0">
+                <a:solidFill>
+                  <a:srgbClr val="080808"/>
+                </a:solidFill>
+                <a:latin typeface="Calibri"/>
+                <a:ea typeface="Calibri"/>
+                <a:cs typeface="Calibri"/>
+              </a:rPr>
+              <a:t> and </a:t>
+            </a:r>
+            <a:r>
+              <a:rPr sz="2400" b="0">
+                <a:solidFill>
+                  <a:srgbClr val="067D17"/>
+                </a:solidFill>
+                <a:latin typeface="JetBrains Mono"/>
+                <a:ea typeface="JetBrains Mono"/>
+                <a:cs typeface="JetBrains Mono"/>
+              </a:rPr>
+              <a:t>"Subtitle characters: 10"</a:t>
+            </a:r>
+            <a:r>
+              <a:rPr sz="2400" b="0">
+                <a:solidFill>
+                  <a:srgbClr val="080808"/>
+                </a:solidFill>
+                <a:latin typeface="Calibri"/>
+                <a:ea typeface="Calibri"/>
+                <a:cs typeface="Calibri"/>
+              </a:rPr>
+              <a:t>.</a:t>
             </a:r>
           </a:p>
         </p:txBody>
@@ -8084,7 +8260,7 @@
         </p:spPr>
         <p:txBody>
           <a:bodyPr xmlns:a="http://schemas.openxmlformats.org/drawingml/2006/main">
-            <a:normAutofit fontScale="100000"/>
+            <a:normAutofit fontScale="87835"/>
           </a:bodyPr>
           <a:lstStyle xmlns:a="http://schemas.openxmlformats.org/drawingml/2006/main"/>
           <a:p xmlns:a="http://schemas.openxmlformats.org/drawingml/2006/main">
@@ -8103,7 +8279,7 @@
                 <a:ea typeface="Calibri"/>
                 <a:cs typeface="Calibri"/>
               </a:rPr>
-              <a:t>Create a two-line poster checker. Ask for a heading and one instruction, display the poster on two lines, and report the combined character count using the two </a:t>
+              <a:t>Ask for a poster heading and store it in [heading]. Ask for one instruction and store it in [instruction]. Display [heading] on the first line and [instruction] on the second line by placing \n between them. Add </a:t>
             </a:r>
             <a:r>
               <a:rPr sz="2400" b="0">
@@ -8114,7 +8290,7 @@
                 <a:ea typeface="JetBrains Mono"/>
                 <a:cs typeface="JetBrains Mono"/>
               </a:rPr>
-              <a:t>len()</a:t>
+              <a:t>len</a:t>
             </a:r>
             <a:r>
               <a:rPr sz="2400" b="0">
@@ -8125,7 +8301,117 @@
                 <a:ea typeface="Calibri"/>
                 <a:cs typeface="Calibri"/>
               </a:rPr>
-              <a:t> results.</a:t>
+              <a:t>(heading) and </a:t>
+            </a:r>
+            <a:r>
+              <a:rPr sz="2400" b="0">
+                <a:solidFill>
+                  <a:srgbClr val="1750EB"/>
+                </a:solidFill>
+                <a:latin typeface="JetBrains Mono"/>
+                <a:ea typeface="JetBrains Mono"/>
+                <a:cs typeface="JetBrains Mono"/>
+              </a:rPr>
+              <a:t>len</a:t>
+            </a:r>
+            <a:r>
+              <a:rPr sz="2400" b="0">
+                <a:solidFill>
+                  <a:srgbClr val="080808"/>
+                </a:solidFill>
+                <a:latin typeface="Calibri"/>
+                <a:ea typeface="Calibri"/>
+                <a:cs typeface="Calibri"/>
+              </a:rPr>
+              <a:t>(instruction), then display </a:t>
+            </a:r>
+            <a:r>
+              <a:rPr sz="2400" b="0">
+                <a:solidFill>
+                  <a:srgbClr val="067D17"/>
+                </a:solidFill>
+                <a:latin typeface="JetBrains Mono"/>
+                <a:ea typeface="JetBrains Mono"/>
+                <a:cs typeface="JetBrains Mono"/>
+              </a:rPr>
+              <a:t>"Combined characters:"</a:t>
+            </a:r>
+            <a:r>
+              <a:rPr sz="2400" b="0">
+                <a:solidFill>
+                  <a:srgbClr val="080808"/>
+                </a:solidFill>
+                <a:latin typeface="Calibri"/>
+                <a:ea typeface="Calibri"/>
+                <a:cs typeface="Calibri"/>
+              </a:rPr>
+              <a:t> followed by the result. Test </a:t>
+            </a:r>
+            <a:r>
+              <a:rPr sz="2400" b="0">
+                <a:solidFill>
+                  <a:srgbClr val="067D17"/>
+                </a:solidFill>
+                <a:latin typeface="JetBrains Mono"/>
+                <a:ea typeface="JetBrains Mono"/>
+                <a:cs typeface="JetBrains Mono"/>
+              </a:rPr>
+              <a:t>"Welcome"</a:t>
+            </a:r>
+            <a:r>
+              <a:rPr sz="2400" b="0">
+                <a:solidFill>
+                  <a:srgbClr val="080808"/>
+                </a:solidFill>
+                <a:latin typeface="Calibri"/>
+                <a:ea typeface="Calibri"/>
+                <a:cs typeface="Calibri"/>
+              </a:rPr>
+              <a:t> and </a:t>
+            </a:r>
+            <a:r>
+              <a:rPr sz="2400" b="0">
+                <a:solidFill>
+                  <a:srgbClr val="067D17"/>
+                </a:solidFill>
+                <a:latin typeface="JetBrains Mono"/>
+                <a:ea typeface="JetBrains Mono"/>
+                <a:cs typeface="JetBrains Mono"/>
+              </a:rPr>
+              <a:t>"Sit here"</a:t>
+            </a:r>
+            <a:r>
+              <a:rPr sz="2400" b="0">
+                <a:solidFill>
+                  <a:srgbClr val="080808"/>
+                </a:solidFill>
+                <a:latin typeface="Calibri"/>
+                <a:ea typeface="Calibri"/>
+                <a:cs typeface="Calibri"/>
+              </a:rPr>
+              <a:t>; display </a:t>
+            </a:r>
+            <a:r>
+              <a:rPr sz="2400" b="0">
+                <a:solidFill>
+                  <a:srgbClr val="067D17"/>
+                </a:solidFill>
+                <a:latin typeface="JetBrains Mono"/>
+                <a:ea typeface="JetBrains Mono"/>
+                <a:cs typeface="JetBrains Mono"/>
+              </a:rPr>
+              <a:t>"Combined characters: 15"</a:t>
+            </a:r>
+            <a:r>
+              <a:rPr sz="2400" b="0">
+                <a:solidFill>
+                  <a:srgbClr val="080808"/>
+                </a:solidFill>
+                <a:latin typeface="Calibri"/>
+                <a:ea typeface="Calibri"/>
+                <a:cs typeface="Calibri"/>
+              </a:rPr>
+              <a:t>.</a:t>
             </a:r>
           </a:p>
         </p:txBody>

--- a/Mapped Curriculum Lessons/Grade 7/Lesson 16 - Text Length and Lines/Text Length and Lines - Slides.pptx
+++ b/Mapped Curriculum Lessons/Grade 7/Lesson 16 - Text Length and Lines/Text Length and Lines - Slides.pptx
@@ -2,28 +2,28 @@
 <file path=ppt/presentation.xml><?xml version="1.0" encoding="utf-8"?>
 <p:presentation xmlns:p="http://schemas.openxmlformats.org/presentationml/2006/main" embedTrueTypeFonts="1" saveSubsetFonts="0">
   <p:sldMasterIdLst>
-    <p:sldMasterId xmlns:r="http://schemas.openxmlformats.org/officeDocument/2006/relationships" id="2147483648" r:id="Rce7f42ef656a4bb5"/>
+    <p:sldMasterId xmlns:r="http://schemas.openxmlformats.org/officeDocument/2006/relationships" id="2147483648" r:id="R97d9d23e25cb47d8"/>
   </p:sldMasterIdLst>
   <p:notesMasterIdLst>
-    <p:notesMasterId xmlns:r="http://schemas.openxmlformats.org/officeDocument/2006/relationships" r:id="R8cfc3d01c9044ec6"/>
+    <p:notesMasterId xmlns:r="http://schemas.openxmlformats.org/officeDocument/2006/relationships" r:id="R903f1e96ccbb4b98"/>
   </p:notesMasterIdLst>
   <p:sldIdLst>
-    <p:sldId xmlns:r="http://schemas.openxmlformats.org/officeDocument/2006/relationships" id="256" r:id="R812e7cada6924d63"/>
-    <p:sldId xmlns:r="http://schemas.openxmlformats.org/officeDocument/2006/relationships" id="257" r:id="R5d66a3c7ee0a47e4"/>
-    <p:sldId xmlns:r="http://schemas.openxmlformats.org/officeDocument/2006/relationships" id="258" r:id="Rea247b5c601d448c"/>
-    <p:sldId xmlns:r="http://schemas.openxmlformats.org/officeDocument/2006/relationships" id="259" r:id="R3e46cea261c84bfe"/>
-    <p:sldId xmlns:r="http://schemas.openxmlformats.org/officeDocument/2006/relationships" id="260" r:id="R332e9902d41245e3"/>
-    <p:sldId xmlns:r="http://schemas.openxmlformats.org/officeDocument/2006/relationships" id="261" r:id="Rb0b00e2ae2d54773"/>
-    <p:sldId xmlns:r="http://schemas.openxmlformats.org/officeDocument/2006/relationships" id="262" r:id="R53198191dbd94ee1"/>
-    <p:sldId xmlns:r="http://schemas.openxmlformats.org/officeDocument/2006/relationships" id="263" r:id="R3cd162917ebc45c4"/>
-    <p:sldId xmlns:r="http://schemas.openxmlformats.org/officeDocument/2006/relationships" id="264" r:id="Rb5178f8121124d6d"/>
+    <p:sldId xmlns:r="http://schemas.openxmlformats.org/officeDocument/2006/relationships" id="256" r:id="Rce037980009544a6"/>
+    <p:sldId xmlns:r="http://schemas.openxmlformats.org/officeDocument/2006/relationships" id="257" r:id="R8ec4eb5aceec46ec"/>
+    <p:sldId xmlns:r="http://schemas.openxmlformats.org/officeDocument/2006/relationships" id="258" r:id="Rc9c6adf8911d474b"/>
+    <p:sldId xmlns:r="http://schemas.openxmlformats.org/officeDocument/2006/relationships" id="259" r:id="Rfb8617c9074c4e7a"/>
+    <p:sldId xmlns:r="http://schemas.openxmlformats.org/officeDocument/2006/relationships" id="260" r:id="Ree6fad05107f42ef"/>
+    <p:sldId xmlns:r="http://schemas.openxmlformats.org/officeDocument/2006/relationships" id="261" r:id="R455dd11bf0604875"/>
+    <p:sldId xmlns:r="http://schemas.openxmlformats.org/officeDocument/2006/relationships" id="262" r:id="Rc20db67a6a0b45ac"/>
+    <p:sldId xmlns:r="http://schemas.openxmlformats.org/officeDocument/2006/relationships" id="263" r:id="Rc8db4a5bf8984063"/>
+    <p:sldId xmlns:r="http://schemas.openxmlformats.org/officeDocument/2006/relationships" id="264" r:id="Ra81957d015ee43c5"/>
   </p:sldIdLst>
   <p:sldSz cx="12192000" cy="6858000"/>
   <p:notesSz cx="6858000" cy="9144000"/>
   <p:embeddedFontLst>
     <p:embeddedFont>
       <p:font typeface="JetBrains Mono"/>
-      <p:regular xmlns:r="http://schemas.openxmlformats.org/officeDocument/2006/relationships" r:id="Rae248dbc2036412d"/>
+      <p:regular xmlns:r="http://schemas.openxmlformats.org/officeDocument/2006/relationships" r:id="Rdbd84c3bf7fd4045"/>
     </p:embeddedFont>
   </p:embeddedFontLst>
 </p:presentation>
@@ -1071,7 +1071,7 @@
           <p:nvPr/>
         </p:nvPicPr>
         <p:blipFill rotWithShape="1">
-          <a:blip xmlns:r="http://schemas.openxmlformats.org/officeDocument/2006/relationships" xmlns:a="http://schemas.openxmlformats.org/drawingml/2006/main" r:embed="Rcd6c92896ff44aa0"/>
+          <a:blip xmlns:r="http://schemas.openxmlformats.org/officeDocument/2006/relationships" xmlns:a="http://schemas.openxmlformats.org/drawingml/2006/main" r:embed="R8e668fff7a99427b"/>
           <a:stretch xmlns:a="http://schemas.openxmlformats.org/drawingml/2006/main"/>
         </p:blipFill>
         <p:spPr>
@@ -1451,7 +1451,7 @@
           <p:nvPr/>
         </p:nvPicPr>
         <p:blipFill rotWithShape="1">
-          <a:blip xmlns:r="http://schemas.openxmlformats.org/officeDocument/2006/relationships" xmlns:a="http://schemas.openxmlformats.org/drawingml/2006/main" r:embed="R3b6bc86ba2b34684">
+          <a:blip xmlns:r="http://schemas.openxmlformats.org/officeDocument/2006/relationships" xmlns:a="http://schemas.openxmlformats.org/drawingml/2006/main" r:embed="R976c6a7797d34590">
             <a:alphaModFix amt="28000"/>
           </a:blip>
           <a:stretch xmlns:a="http://schemas.openxmlformats.org/drawingml/2006/main"/>
@@ -1664,7 +1664,7 @@
           <p:nvPr/>
         </p:nvPicPr>
         <p:blipFill rotWithShape="1">
-          <a:blip xmlns:r="http://schemas.openxmlformats.org/officeDocument/2006/relationships" xmlns:a="http://schemas.openxmlformats.org/drawingml/2006/main" r:embed="R96fa00b3ab864dac">
+          <a:blip xmlns:r="http://schemas.openxmlformats.org/officeDocument/2006/relationships" xmlns:a="http://schemas.openxmlformats.org/drawingml/2006/main" r:embed="Re5f12fdac23f4f74">
             <a:alphaModFix amt="28000"/>
           </a:blip>
           <a:stretch xmlns:a="http://schemas.openxmlformats.org/drawingml/2006/main"/>
@@ -1899,7 +1899,7 @@
           <p:nvPr/>
         </p:nvPicPr>
         <p:blipFill rotWithShape="1">
-          <a:blip xmlns:r="http://schemas.openxmlformats.org/officeDocument/2006/relationships" xmlns:a="http://schemas.openxmlformats.org/drawingml/2006/main" r:embed="R4591736a17cc4d6c">
+          <a:blip xmlns:r="http://schemas.openxmlformats.org/officeDocument/2006/relationships" xmlns:a="http://schemas.openxmlformats.org/drawingml/2006/main" r:embed="R84c0ad317ea84c2a">
             <a:alphaModFix amt="28000"/>
           </a:blip>
           <a:stretch xmlns:a="http://schemas.openxmlformats.org/drawingml/2006/main"/>
@@ -2176,7 +2176,7 @@
           <p:nvPr/>
         </p:nvPicPr>
         <p:blipFill rotWithShape="1">
-          <a:blip xmlns:r="http://schemas.openxmlformats.org/officeDocument/2006/relationships" xmlns:a="http://schemas.openxmlformats.org/drawingml/2006/main" r:embed="Ra47dd1126406485e">
+          <a:blip xmlns:r="http://schemas.openxmlformats.org/officeDocument/2006/relationships" xmlns:a="http://schemas.openxmlformats.org/drawingml/2006/main" r:embed="Ra0fda1921f49430d">
             <a:alphaModFix amt="28000"/>
           </a:blip>
           <a:stretch xmlns:a="http://schemas.openxmlformats.org/drawingml/2006/main"/>
@@ -2451,7 +2451,7 @@
           <p:nvPr/>
         </p:nvPicPr>
         <p:blipFill rotWithShape="1">
-          <a:blip xmlns:r="http://schemas.openxmlformats.org/officeDocument/2006/relationships" xmlns:a="http://schemas.openxmlformats.org/drawingml/2006/main" r:embed="R9215bc23792c4b3b">
+          <a:blip xmlns:r="http://schemas.openxmlformats.org/officeDocument/2006/relationships" xmlns:a="http://schemas.openxmlformats.org/drawingml/2006/main" r:embed="R0400e6f4ff854853">
             <a:alphaModFix amt="28000"/>
           </a:blip>
           <a:stretch xmlns:a="http://schemas.openxmlformats.org/drawingml/2006/main"/>
@@ -2875,7 +2875,7 @@
           <p:nvPr/>
         </p:nvPicPr>
         <p:blipFill rotWithShape="1">
-          <a:blip xmlns:r="http://schemas.openxmlformats.org/officeDocument/2006/relationships" xmlns:a="http://schemas.openxmlformats.org/drawingml/2006/main" r:embed="R1967237256c946dc">
+          <a:blip xmlns:r="http://schemas.openxmlformats.org/officeDocument/2006/relationships" xmlns:a="http://schemas.openxmlformats.org/drawingml/2006/main" r:embed="Rc3412d54b4db44ea">
             <a:alphaModFix amt="28000"/>
           </a:blip>
           <a:stretch xmlns:a="http://schemas.openxmlformats.org/drawingml/2006/main"/>
@@ -3016,7 +3016,7 @@
           <p:nvPr/>
         </p:nvPicPr>
         <p:blipFill rotWithShape="1">
-          <a:blip xmlns:r="http://schemas.openxmlformats.org/officeDocument/2006/relationships" xmlns:a="http://schemas.openxmlformats.org/drawingml/2006/main" r:embed="R81f7b5192ca44a73">
+          <a:blip xmlns:r="http://schemas.openxmlformats.org/officeDocument/2006/relationships" xmlns:a="http://schemas.openxmlformats.org/drawingml/2006/main" r:embed="R1152ae12cda64add">
             <a:alphaModFix amt="28000"/>
           </a:blip>
           <a:stretch xmlns:a="http://schemas.openxmlformats.org/drawingml/2006/main"/>
@@ -3130,7 +3130,7 @@
           <p:nvPr/>
         </p:nvPicPr>
         <p:blipFill rotWithShape="1">
-          <a:blip xmlns:r="http://schemas.openxmlformats.org/officeDocument/2006/relationships" xmlns:a="http://schemas.openxmlformats.org/drawingml/2006/main" r:embed="Ree3410684a9147d9">
+          <a:blip xmlns:r="http://schemas.openxmlformats.org/officeDocument/2006/relationships" xmlns:a="http://schemas.openxmlformats.org/drawingml/2006/main" r:embed="R904d6468c1054483">
             <a:alphaModFix amt="28000"/>
           </a:blip>
           <a:stretch xmlns:a="http://schemas.openxmlformats.org/drawingml/2006/main"/>
@@ -3457,7 +3457,7 @@
           <p:nvPr/>
         </p:nvPicPr>
         <p:blipFill rotWithShape="1">
-          <a:blip xmlns:r="http://schemas.openxmlformats.org/officeDocument/2006/relationships" xmlns:a="http://schemas.openxmlformats.org/drawingml/2006/main" r:embed="Rb66acc78f5c44032">
+          <a:blip xmlns:r="http://schemas.openxmlformats.org/officeDocument/2006/relationships" xmlns:a="http://schemas.openxmlformats.org/drawingml/2006/main" r:embed="R034a894a4d744943">
             <a:alphaModFix amt="28000"/>
           </a:blip>
           <a:stretch xmlns:a="http://schemas.openxmlformats.org/drawingml/2006/main"/>
@@ -3745,7 +3745,7 @@
           <p:nvPr/>
         </p:nvPicPr>
         <p:blipFill rotWithShape="1">
-          <a:blip xmlns:r="http://schemas.openxmlformats.org/officeDocument/2006/relationships" xmlns:a="http://schemas.openxmlformats.org/drawingml/2006/main" r:embed="Rc91977902bea4990">
+          <a:blip xmlns:r="http://schemas.openxmlformats.org/officeDocument/2006/relationships" xmlns:a="http://schemas.openxmlformats.org/drawingml/2006/main" r:embed="Rdbdf2d8effd04906">
             <a:alphaModFix amt="28000"/>
           </a:blip>
           <a:stretch xmlns:a="http://schemas.openxmlformats.org/drawingml/2006/main"/>
@@ -3982,17 +3982,17 @@
   </p:cSld>
   <p:clrMap bg1="lt1" tx1="dk1" bg2="lt2" tx2="dk2" accent1="accent1" accent2="accent2" accent3="accent3" accent4="accent4" accent5="accent5" accent6="accent6" hlink="hlink" folHlink="folHlink"/>
   <p:sldLayoutIdLst>
-    <p:sldLayoutId xmlns:r="http://schemas.openxmlformats.org/officeDocument/2006/relationships" id="2147483649" r:id="R3ef64334872043e2"/>
-    <p:sldLayoutId xmlns:r="http://schemas.openxmlformats.org/officeDocument/2006/relationships" id="2147483650" r:id="Rd77d7780649d4549"/>
-    <p:sldLayoutId xmlns:r="http://schemas.openxmlformats.org/officeDocument/2006/relationships" id="2147483651" r:id="R72981a06c9bd45fd"/>
-    <p:sldLayoutId xmlns:r="http://schemas.openxmlformats.org/officeDocument/2006/relationships" id="2147483652" r:id="R2b109fdcc307412f"/>
-    <p:sldLayoutId xmlns:r="http://schemas.openxmlformats.org/officeDocument/2006/relationships" id="2147483653" r:id="R849ad96be454488b"/>
-    <p:sldLayoutId xmlns:r="http://schemas.openxmlformats.org/officeDocument/2006/relationships" id="2147483654" r:id="R13e6250d50394ee2"/>
-    <p:sldLayoutId xmlns:r="http://schemas.openxmlformats.org/officeDocument/2006/relationships" id="2147483655" r:id="R8a57a19f013341fb"/>
-    <p:sldLayoutId xmlns:r="http://schemas.openxmlformats.org/officeDocument/2006/relationships" id="2147483656" r:id="R1a1442d72c0148d7"/>
-    <p:sldLayoutId xmlns:r="http://schemas.openxmlformats.org/officeDocument/2006/relationships" id="2147483657" r:id="R3d6ee40f182d402c"/>
-    <p:sldLayoutId xmlns:r="http://schemas.openxmlformats.org/officeDocument/2006/relationships" id="2147483658" r:id="R3facc4317b8a46de"/>
-    <p:sldLayoutId xmlns:r="http://schemas.openxmlformats.org/officeDocument/2006/relationships" id="2147483659" r:id="R7f403cfea44349aa"/>
+    <p:sldLayoutId xmlns:r="http://schemas.openxmlformats.org/officeDocument/2006/relationships" id="2147483649" r:id="R033366a7254a46cb"/>
+    <p:sldLayoutId xmlns:r="http://schemas.openxmlformats.org/officeDocument/2006/relationships" id="2147483650" r:id="Rbabf9898b33e476c"/>
+    <p:sldLayoutId xmlns:r="http://schemas.openxmlformats.org/officeDocument/2006/relationships" id="2147483651" r:id="R3c3797db66c74ba9"/>
+    <p:sldLayoutId xmlns:r="http://schemas.openxmlformats.org/officeDocument/2006/relationships" id="2147483652" r:id="R85e4df9e36f44260"/>
+    <p:sldLayoutId xmlns:r="http://schemas.openxmlformats.org/officeDocument/2006/relationships" id="2147483653" r:id="R46a9b3de99e74840"/>
+    <p:sldLayoutId xmlns:r="http://schemas.openxmlformats.org/officeDocument/2006/relationships" id="2147483654" r:id="Rcd3c7e4c064a42f4"/>
+    <p:sldLayoutId xmlns:r="http://schemas.openxmlformats.org/officeDocument/2006/relationships" id="2147483655" r:id="Rccd2fd653700448b"/>
+    <p:sldLayoutId xmlns:r="http://schemas.openxmlformats.org/officeDocument/2006/relationships" id="2147483656" r:id="R6feb14ce108b4257"/>
+    <p:sldLayoutId xmlns:r="http://schemas.openxmlformats.org/officeDocument/2006/relationships" id="2147483657" r:id="R5b484012263f4c95"/>
+    <p:sldLayoutId xmlns:r="http://schemas.openxmlformats.org/officeDocument/2006/relationships" id="2147483658" r:id="R6bf9a0ee8d9b45a3"/>
+    <p:sldLayoutId xmlns:r="http://schemas.openxmlformats.org/officeDocument/2006/relationships" id="2147483659" r:id="R81589263e8724db4"/>
   </p:sldLayoutIdLst>
   <p:hf hdr="0" ftr="0" dt="0"/>
   <p:txStyles>
@@ -6897,10 +6897,10 @@
                 <a:ea typeface="Calibri"/>
                 <a:cs typeface="Calibri"/>
               </a:rPr>
-              <a:t>Use </a:t>
-            </a:r>
-            <a:r>
-              <a:rPr sz="2400" b="0">
+              <a:t>Change the example so it uses </a:t>
+            </a:r>
+            <a:r>
+              <a:rPr sz="2050" b="0">
                 <a:solidFill>
                   <a:srgbClr val="1750EB"/>
                 </a:solidFill>
@@ -6919,18 +6919,21 @@
                 <a:ea typeface="Calibri"/>
                 <a:cs typeface="Calibri"/>
               </a:rPr>
-              <a:t> to remove spaces from the start and end of [message] before using </a:t>
-            </a:r>
-            <a:r>
-              <a:rPr sz="2400" b="0">
-                <a:solidFill>
-                  <a:srgbClr val="1750EB"/>
-                </a:solidFill>
-                <a:latin typeface="JetBrains Mono"/>
-                <a:ea typeface="JetBrains Mono"/>
-                <a:cs typeface="JetBrains Mono"/>
-              </a:rPr>
-              <a:t>len()</a:t>
+              <a:t> on </a:t>
+            </a:r>
+            <a:r>
+              <a:rPr sz="2050" b="0">
+                <a:solidFill>
+                  <a:srgbClr val="6A1B9A"/>
+                </a:solidFill>
+                <a:highlight>
+                  <a:srgbClr val="ECEAF4"/>
+                </a:highlight>
+                <a:latin typeface="JetBrains Mono"/>
+                <a:ea typeface="JetBrains Mono"/>
+                <a:cs typeface="JetBrains Mono"/>
+              </a:rPr>
+              <a:t> message </a:t>
             </a:r>
             <a:r>
               <a:rPr sz="2400" b="0">
@@ -6941,18 +6944,18 @@
                 <a:ea typeface="Calibri"/>
                 <a:cs typeface="Calibri"/>
               </a:rPr>
-              <a:t>. Store the new length in [character_count]. Test </a:t>
-            </a:r>
-            <a:r>
-              <a:rPr sz="2400" b="0">
-                <a:solidFill>
-                  <a:srgbClr val="067D17"/>
-                </a:solidFill>
-                <a:latin typeface="JetBrains Mono"/>
-                <a:ea typeface="JetBrains Mono"/>
-                <a:cs typeface="JetBrains Mono"/>
-              </a:rPr>
-              <a:t>"  Code now  "</a:t>
+              <a:t> before counting its characters with </a:t>
+            </a:r>
+            <a:r>
+              <a:rPr sz="2050" b="0">
+                <a:solidFill>
+                  <a:srgbClr val="1750EB"/>
+                </a:solidFill>
+                <a:latin typeface="JetBrains Mono"/>
+                <a:ea typeface="JetBrains Mono"/>
+                <a:cs typeface="JetBrains Mono"/>
+              </a:rPr>
+              <a:t>len()</a:t>
             </a:r>
             <a:r>
               <a:rPr sz="2400" b="0">
@@ -6963,10 +6966,10 @@
                 <a:ea typeface="Calibri"/>
                 <a:cs typeface="Calibri"/>
               </a:rPr>
-              <a:t>; display </a:t>
-            </a:r>
-            <a:r>
-              <a:rPr sz="2400" b="0">
+              <a:t>. For example, </a:t>
+            </a:r>
+            <a:r>
+              <a:rPr sz="2050" b="0">
                 <a:solidFill>
                   <a:srgbClr val="067D17"/>
                 </a:solidFill>
@@ -6974,7 +6977,7 @@
                 <a:ea typeface="JetBrains Mono"/>
                 <a:cs typeface="JetBrains Mono"/>
               </a:rPr>
-              <a:t>"Code now"</a:t>
+              <a:t>"  Code now  "</a:t>
             </a:r>
             <a:r>
               <a:rPr sz="2400" b="0">
@@ -6985,10 +6988,10 @@
                 <a:ea typeface="Calibri"/>
                 <a:cs typeface="Calibri"/>
               </a:rPr>
-              <a:t> on the message line and </a:t>
-            </a:r>
-            <a:r>
-              <a:rPr sz="2400" b="0">
+              <a:t> displays </a:t>
+            </a:r>
+            <a:r>
+              <a:rPr sz="2050" b="0">
                 <a:solidFill>
                   <a:srgbClr val="067D17"/>
                 </a:solidFill>
@@ -6996,7 +6999,7 @@
                 <a:ea typeface="JetBrains Mono"/>
                 <a:cs typeface="JetBrains Mono"/>
               </a:rPr>
-              <a:t>"Characters: 8"</a:t>
+              <a:t>"Code now"</a:t>
             </a:r>
             <a:r>
               <a:rPr sz="2400" b="0">
@@ -7007,7 +7010,29 @@
                 <a:ea typeface="Calibri"/>
                 <a:cs typeface="Calibri"/>
               </a:rPr>
-              <a:t> on the final line.</a:t>
+              <a:t> and </a:t>
+            </a:r>
+            <a:r>
+              <a:rPr sz="2050" b="0">
+                <a:solidFill>
+                  <a:srgbClr val="067D17"/>
+                </a:solidFill>
+                <a:latin typeface="JetBrains Mono"/>
+                <a:ea typeface="JetBrains Mono"/>
+                <a:cs typeface="JetBrains Mono"/>
+              </a:rPr>
+              <a:t>"Characters: 8"</a:t>
+            </a:r>
+            <a:r>
+              <a:rPr sz="2400" b="0">
+                <a:solidFill>
+                  <a:srgbClr val="080808"/>
+                </a:solidFill>
+                <a:latin typeface="Calibri"/>
+                <a:ea typeface="Calibri"/>
+                <a:cs typeface="Calibri"/>
+              </a:rPr>
+              <a:t>.</a:t>
             </a:r>
           </a:p>
         </p:txBody>
@@ -7588,18 +7613,21 @@
                 <a:ea typeface="Calibri"/>
                 <a:cs typeface="Calibri"/>
               </a:rPr>
-              <a:t>Ask for a title and store it in [title]. Ask for a subtitle and store it in [subtitle]. Display the title and subtitle on separate lines, followed by a labelled </a:t>
-            </a:r>
-            <a:r>
-              <a:rPr sz="2400" b="0">
-                <a:solidFill>
-                  <a:srgbClr val="1750EB"/>
-                </a:solidFill>
-                <a:latin typeface="JetBrains Mono"/>
-                <a:ea typeface="JetBrains Mono"/>
-                <a:cs typeface="JetBrains Mono"/>
-              </a:rPr>
-              <a:t>len()</a:t>
+              <a:t>Change the example so it asks for </a:t>
+            </a:r>
+            <a:r>
+              <a:rPr sz="2050" b="0">
+                <a:solidFill>
+                  <a:srgbClr val="6A1B9A"/>
+                </a:solidFill>
+                <a:highlight>
+                  <a:srgbClr val="ECEAF4"/>
+                </a:highlight>
+                <a:latin typeface="JetBrains Mono"/>
+                <a:ea typeface="JetBrains Mono"/>
+                <a:cs typeface="JetBrains Mono"/>
+              </a:rPr>
+              <a:t> title </a:t>
             </a:r>
             <a:r>
               <a:rPr sz="2400" b="0">
@@ -7610,18 +7638,21 @@
                 <a:ea typeface="Calibri"/>
                 <a:cs typeface="Calibri"/>
               </a:rPr>
-              <a:t> result for each one. Test </a:t>
-            </a:r>
-            <a:r>
-              <a:rPr sz="2400" b="0">
-                <a:solidFill>
-                  <a:srgbClr val="067D17"/>
-                </a:solidFill>
-                <a:latin typeface="JetBrains Mono"/>
-                <a:ea typeface="JetBrains Mono"/>
-                <a:cs typeface="JetBrains Mono"/>
-              </a:rPr>
-              <a:t>"Code Club"</a:t>
+              <a:t> and </a:t>
+            </a:r>
+            <a:r>
+              <a:rPr sz="2050" b="0">
+                <a:solidFill>
+                  <a:srgbClr val="6A1B9A"/>
+                </a:solidFill>
+                <a:highlight>
+                  <a:srgbClr val="ECEAF4"/>
+                </a:highlight>
+                <a:latin typeface="JetBrains Mono"/>
+                <a:ea typeface="JetBrains Mono"/>
+                <a:cs typeface="JetBrains Mono"/>
+              </a:rPr>
+              <a:t> subtitle </a:t>
             </a:r>
             <a:r>
               <a:rPr sz="2400" b="0">
@@ -7632,10 +7663,10 @@
                 <a:ea typeface="Calibri"/>
                 <a:cs typeface="Calibri"/>
               </a:rPr>
-              <a:t> and </a:t>
-            </a:r>
-            <a:r>
-              <a:rPr sz="2400" b="0">
+              <a:t>. Display them on separate lines after </a:t>
+            </a:r>
+            <a:r>
+              <a:rPr sz="2050" b="0">
                 <a:solidFill>
                   <a:srgbClr val="067D17"/>
                 </a:solidFill>
@@ -7643,7 +7674,7 @@
                 <a:ea typeface="JetBrains Mono"/>
                 <a:cs typeface="JetBrains Mono"/>
               </a:rPr>
-              <a:t>"Join today"</a:t>
+              <a:t>"Text:"</a:t>
             </a:r>
             <a:r>
               <a:rPr sz="2400" b="0">
@@ -7654,18 +7685,18 @@
                 <a:ea typeface="Calibri"/>
                 <a:cs typeface="Calibri"/>
               </a:rPr>
-              <a:t>; display </a:t>
-            </a:r>
-            <a:r>
-              <a:rPr sz="2400" b="0">
-                <a:solidFill>
-                  <a:srgbClr val="067D17"/>
-                </a:solidFill>
-                <a:latin typeface="JetBrains Mono"/>
-                <a:ea typeface="JetBrains Mono"/>
-                <a:cs typeface="JetBrains Mono"/>
-              </a:rPr>
-              <a:t>"Title characters: 9"</a:t>
+              <a:t>, then use </a:t>
+            </a:r>
+            <a:r>
+              <a:rPr sz="2050" b="0">
+                <a:solidFill>
+                  <a:srgbClr val="1750EB"/>
+                </a:solidFill>
+                <a:latin typeface="JetBrains Mono"/>
+                <a:ea typeface="JetBrains Mono"/>
+                <a:cs typeface="JetBrains Mono"/>
+              </a:rPr>
+              <a:t>len()</a:t>
             </a:r>
             <a:r>
               <a:rPr sz="2400" b="0">
@@ -7676,10 +7707,10 @@
                 <a:ea typeface="Calibri"/>
                 <a:cs typeface="Calibri"/>
               </a:rPr>
-              <a:t> and </a:t>
-            </a:r>
-            <a:r>
-              <a:rPr sz="2400" b="0">
+              <a:t> to display </a:t>
+            </a:r>
+            <a:r>
+              <a:rPr sz="2050" b="0">
                 <a:solidFill>
                   <a:srgbClr val="067D17"/>
                 </a:solidFill>
@@ -7687,7 +7718,7 @@
                 <a:ea typeface="JetBrains Mono"/>
                 <a:cs typeface="JetBrains Mono"/>
               </a:rPr>
-              <a:t>"Subtitle characters: 10"</a:t>
+              <a:t>"Title characters:"</a:t>
             </a:r>
             <a:r>
               <a:rPr sz="2400" b="0">
@@ -7698,7 +7729,73 @@
                 <a:ea typeface="Calibri"/>
                 <a:cs typeface="Calibri"/>
               </a:rPr>
-              <a:t>.</a:t>
+              <a:t> and </a:t>
+            </a:r>
+            <a:r>
+              <a:rPr sz="2050" b="0">
+                <a:solidFill>
+                  <a:srgbClr val="067D17"/>
+                </a:solidFill>
+                <a:latin typeface="JetBrains Mono"/>
+                <a:ea typeface="JetBrains Mono"/>
+                <a:cs typeface="JetBrains Mono"/>
+              </a:rPr>
+              <a:t>"Subtitle characters:"</a:t>
+            </a:r>
+            <a:r>
+              <a:rPr sz="2400" b="0">
+                <a:solidFill>
+                  <a:srgbClr val="080808"/>
+                </a:solidFill>
+                <a:latin typeface="Calibri"/>
+                <a:ea typeface="Calibri"/>
+                <a:cs typeface="Calibri"/>
+              </a:rPr>
+              <a:t> with each count. For example, </a:t>
+            </a:r>
+            <a:r>
+              <a:rPr sz="2050" b="0">
+                <a:solidFill>
+                  <a:srgbClr val="067D17"/>
+                </a:solidFill>
+                <a:latin typeface="JetBrains Mono"/>
+                <a:ea typeface="JetBrains Mono"/>
+                <a:cs typeface="JetBrains Mono"/>
+              </a:rPr>
+              <a:t>"Code Club"</a:t>
+            </a:r>
+            <a:r>
+              <a:rPr sz="2400" b="0">
+                <a:solidFill>
+                  <a:srgbClr val="080808"/>
+                </a:solidFill>
+                <a:latin typeface="Calibri"/>
+                <a:ea typeface="Calibri"/>
+                <a:cs typeface="Calibri"/>
+              </a:rPr>
+              <a:t> and </a:t>
+            </a:r>
+            <a:r>
+              <a:rPr sz="2050" b="0">
+                <a:solidFill>
+                  <a:srgbClr val="067D17"/>
+                </a:solidFill>
+                <a:latin typeface="JetBrains Mono"/>
+                <a:ea typeface="JetBrains Mono"/>
+                <a:cs typeface="JetBrains Mono"/>
+              </a:rPr>
+              <a:t>"Join today"</a:t>
+            </a:r>
+            <a:r>
+              <a:rPr sz="2400" b="0">
+                <a:solidFill>
+                  <a:srgbClr val="080808"/>
+                </a:solidFill>
+                <a:latin typeface="Calibri"/>
+                <a:ea typeface="Calibri"/>
+                <a:cs typeface="Calibri"/>
+              </a:rPr>
+              <a:t> give 9 and 10.</a:t>
             </a:r>
           </a:p>
         </p:txBody>
@@ -8260,7 +8357,7 @@
         </p:spPr>
         <p:txBody>
           <a:bodyPr xmlns:a="http://schemas.openxmlformats.org/drawingml/2006/main">
-            <a:normAutofit fontScale="87835"/>
+            <a:normAutofit fontScale="100000"/>
           </a:bodyPr>
           <a:lstStyle xmlns:a="http://schemas.openxmlformats.org/drawingml/2006/main"/>
           <a:p xmlns:a="http://schemas.openxmlformats.org/drawingml/2006/main">
@@ -8279,18 +8376,18 @@
                 <a:ea typeface="Calibri"/>
                 <a:cs typeface="Calibri"/>
               </a:rPr>
-              <a:t>Ask for a poster heading and store it in [heading]. Ask for one instruction and store it in [instruction]. Display [heading] on the first line and [instruction] on the second line by placing \n between them. Add </a:t>
-            </a:r>
-            <a:r>
-              <a:rPr sz="2400" b="0">
-                <a:solidFill>
-                  <a:srgbClr val="1750EB"/>
-                </a:solidFill>
-                <a:latin typeface="JetBrains Mono"/>
-                <a:ea typeface="JetBrains Mono"/>
-                <a:cs typeface="JetBrains Mono"/>
-              </a:rPr>
-              <a:t>len</a:t>
+              <a:t>Create a poster checker that asks for a heading and an instruction. Display them on two lines using </a:t>
+            </a:r>
+            <a:r>
+              <a:rPr sz="2050" b="0">
+                <a:solidFill>
+                  <a:srgbClr val="067D17"/>
+                </a:solidFill>
+                <a:latin typeface="JetBrains Mono"/>
+                <a:ea typeface="JetBrains Mono"/>
+                <a:cs typeface="JetBrains Mono"/>
+              </a:rPr>
+              <a:t>"\n"</a:t>
             </a:r>
             <a:r>
               <a:rPr sz="2400" b="0">
@@ -8301,10 +8398,10 @@
                 <a:ea typeface="Calibri"/>
                 <a:cs typeface="Calibri"/>
               </a:rPr>
-              <a:t>(heading) and </a:t>
-            </a:r>
-            <a:r>
-              <a:rPr sz="2400" b="0">
+              <a:t>. Add the two </a:t>
+            </a:r>
+            <a:r>
+              <a:rPr sz="2050" b="0">
                 <a:solidFill>
                   <a:srgbClr val="1750EB"/>
                 </a:solidFill>
@@ -8312,7 +8409,7 @@
                 <a:ea typeface="JetBrains Mono"/>
                 <a:cs typeface="JetBrains Mono"/>
               </a:rPr>
-              <a:t>len</a:t>
+              <a:t>len()</a:t>
             </a:r>
             <a:r>
               <a:rPr sz="2400" b="0">
@@ -8323,10 +8420,10 @@
                 <a:ea typeface="Calibri"/>
                 <a:cs typeface="Calibri"/>
               </a:rPr>
-              <a:t>(instruction), then display </a:t>
-            </a:r>
-            <a:r>
-              <a:rPr sz="2400" b="0">
+              <a:t> results and display </a:t>
+            </a:r>
+            <a:r>
+              <a:rPr sz="2050" b="0">
                 <a:solidFill>
                   <a:srgbClr val="067D17"/>
                 </a:solidFill>
@@ -8345,10 +8442,10 @@
                 <a:ea typeface="Calibri"/>
                 <a:cs typeface="Calibri"/>
               </a:rPr>
-              <a:t> followed by the result. Test </a:t>
-            </a:r>
-            <a:r>
-              <a:rPr sz="2400" b="0">
+              <a:t> with the total. If the total is over 20, also display </a:t>
+            </a:r>
+            <a:r>
+              <a:rPr sz="2050" b="0">
                 <a:solidFill>
                   <a:srgbClr val="067D17"/>
                 </a:solidFill>
@@ -8356,7 +8453,7 @@
                 <a:ea typeface="JetBrains Mono"/>
                 <a:cs typeface="JetBrains Mono"/>
               </a:rPr>
-              <a:t>"Welcome"</a:t>
+              <a:t>"Too long for the poster."</a:t>
             </a:r>
             <a:r>
               <a:rPr sz="2400" b="0">
@@ -8367,10 +8464,10 @@
                 <a:ea typeface="Calibri"/>
                 <a:cs typeface="Calibri"/>
               </a:rPr>
-              <a:t> and </a:t>
-            </a:r>
-            <a:r>
-              <a:rPr sz="2400" b="0">
+              <a:t> Test </a:t>
+            </a:r>
+            <a:r>
+              <a:rPr sz="2050" b="0">
                 <a:solidFill>
                   <a:srgbClr val="067D17"/>
                 </a:solidFill>
@@ -8378,7 +8475,7 @@
                 <a:ea typeface="JetBrains Mono"/>
                 <a:cs typeface="JetBrains Mono"/>
               </a:rPr>
-              <a:t>"Sit here"</a:t>
+              <a:t>"Welcome"</a:t>
             </a:r>
             <a:r>
               <a:rPr sz="2400" b="0">
@@ -8389,10 +8486,10 @@
                 <a:ea typeface="Calibri"/>
                 <a:cs typeface="Calibri"/>
               </a:rPr>
-              <a:t>; display </a:t>
-            </a:r>
-            <a:r>
-              <a:rPr sz="2400" b="0">
+              <a:t> and </a:t>
+            </a:r>
+            <a:r>
+              <a:rPr sz="2050" b="0">
                 <a:solidFill>
                   <a:srgbClr val="067D17"/>
                 </a:solidFill>
@@ -8400,7 +8497,7 @@
                 <a:ea typeface="JetBrains Mono"/>
                 <a:cs typeface="JetBrains Mono"/>
               </a:rPr>
-              <a:t>"Combined characters: 15"</a:t>
+              <a:t>"Sit here"</a:t>
             </a:r>
             <a:r>
               <a:rPr sz="2400" b="0">

--- a/Mapped Curriculum Lessons/Grade 7/Lesson 16 - Text Length and Lines/Text Length and Lines - Slides.pptx
+++ b/Mapped Curriculum Lessons/Grade 7/Lesson 16 - Text Length and Lines/Text Length and Lines - Slides.pptx
@@ -2,28 +2,28 @@
 <file path=ppt/presentation.xml><?xml version="1.0" encoding="utf-8"?>
 <p:presentation xmlns:p="http://schemas.openxmlformats.org/presentationml/2006/main" embedTrueTypeFonts="1" saveSubsetFonts="0">
   <p:sldMasterIdLst>
-    <p:sldMasterId xmlns:r="http://schemas.openxmlformats.org/officeDocument/2006/relationships" id="2147483648" r:id="R97d9d23e25cb47d8"/>
+    <p:sldMasterId xmlns:r="http://schemas.openxmlformats.org/officeDocument/2006/relationships" id="2147483648" r:id="R933fe4758cc841e5"/>
   </p:sldMasterIdLst>
   <p:notesMasterIdLst>
-    <p:notesMasterId xmlns:r="http://schemas.openxmlformats.org/officeDocument/2006/relationships" r:id="R903f1e96ccbb4b98"/>
+    <p:notesMasterId xmlns:r="http://schemas.openxmlformats.org/officeDocument/2006/relationships" r:id="Rf171716d0de646a1"/>
   </p:notesMasterIdLst>
   <p:sldIdLst>
-    <p:sldId xmlns:r="http://schemas.openxmlformats.org/officeDocument/2006/relationships" id="256" r:id="Rce037980009544a6"/>
-    <p:sldId xmlns:r="http://schemas.openxmlformats.org/officeDocument/2006/relationships" id="257" r:id="R8ec4eb5aceec46ec"/>
-    <p:sldId xmlns:r="http://schemas.openxmlformats.org/officeDocument/2006/relationships" id="258" r:id="Rc9c6adf8911d474b"/>
-    <p:sldId xmlns:r="http://schemas.openxmlformats.org/officeDocument/2006/relationships" id="259" r:id="Rfb8617c9074c4e7a"/>
-    <p:sldId xmlns:r="http://schemas.openxmlformats.org/officeDocument/2006/relationships" id="260" r:id="Ree6fad05107f42ef"/>
-    <p:sldId xmlns:r="http://schemas.openxmlformats.org/officeDocument/2006/relationships" id="261" r:id="R455dd11bf0604875"/>
-    <p:sldId xmlns:r="http://schemas.openxmlformats.org/officeDocument/2006/relationships" id="262" r:id="Rc20db67a6a0b45ac"/>
-    <p:sldId xmlns:r="http://schemas.openxmlformats.org/officeDocument/2006/relationships" id="263" r:id="Rc8db4a5bf8984063"/>
-    <p:sldId xmlns:r="http://schemas.openxmlformats.org/officeDocument/2006/relationships" id="264" r:id="Ra81957d015ee43c5"/>
+    <p:sldId xmlns:r="http://schemas.openxmlformats.org/officeDocument/2006/relationships" id="256" r:id="R8344b01eef0a445a"/>
+    <p:sldId xmlns:r="http://schemas.openxmlformats.org/officeDocument/2006/relationships" id="257" r:id="Rc342d483906a4593"/>
+    <p:sldId xmlns:r="http://schemas.openxmlformats.org/officeDocument/2006/relationships" id="258" r:id="R972ea0e8f7354ccc"/>
+    <p:sldId xmlns:r="http://schemas.openxmlformats.org/officeDocument/2006/relationships" id="259" r:id="Rb72e90b391b6492b"/>
+    <p:sldId xmlns:r="http://schemas.openxmlformats.org/officeDocument/2006/relationships" id="260" r:id="R89003e577c6e4923"/>
+    <p:sldId xmlns:r="http://schemas.openxmlformats.org/officeDocument/2006/relationships" id="261" r:id="Rb862ae754e2346b0"/>
+    <p:sldId xmlns:r="http://schemas.openxmlformats.org/officeDocument/2006/relationships" id="262" r:id="R7886008d70174255"/>
+    <p:sldId xmlns:r="http://schemas.openxmlformats.org/officeDocument/2006/relationships" id="263" r:id="R80709dff86dd41a3"/>
+    <p:sldId xmlns:r="http://schemas.openxmlformats.org/officeDocument/2006/relationships" id="264" r:id="R57ec703d161e40d9"/>
   </p:sldIdLst>
   <p:sldSz cx="12192000" cy="6858000"/>
   <p:notesSz cx="6858000" cy="9144000"/>
   <p:embeddedFontLst>
     <p:embeddedFont>
       <p:font typeface="JetBrains Mono"/>
-      <p:regular xmlns:r="http://schemas.openxmlformats.org/officeDocument/2006/relationships" r:id="Rdbd84c3bf7fd4045"/>
+      <p:regular xmlns:r="http://schemas.openxmlformats.org/officeDocument/2006/relationships" r:id="R9d2bc8c8970d45fe"/>
     </p:embeddedFont>
   </p:embeddedFontLst>
 </p:presentation>
@@ -1071,7 +1071,7 @@
           <p:nvPr/>
         </p:nvPicPr>
         <p:blipFill rotWithShape="1">
-          <a:blip xmlns:r="http://schemas.openxmlformats.org/officeDocument/2006/relationships" xmlns:a="http://schemas.openxmlformats.org/drawingml/2006/main" r:embed="R8e668fff7a99427b"/>
+          <a:blip xmlns:r="http://schemas.openxmlformats.org/officeDocument/2006/relationships" xmlns:a="http://schemas.openxmlformats.org/drawingml/2006/main" r:embed="Rdf12abf5bdc448e2"/>
           <a:stretch xmlns:a="http://schemas.openxmlformats.org/drawingml/2006/main"/>
         </p:blipFill>
         <p:spPr>
@@ -1451,7 +1451,7 @@
           <p:nvPr/>
         </p:nvPicPr>
         <p:blipFill rotWithShape="1">
-          <a:blip xmlns:r="http://schemas.openxmlformats.org/officeDocument/2006/relationships" xmlns:a="http://schemas.openxmlformats.org/drawingml/2006/main" r:embed="R976c6a7797d34590">
+          <a:blip xmlns:r="http://schemas.openxmlformats.org/officeDocument/2006/relationships" xmlns:a="http://schemas.openxmlformats.org/drawingml/2006/main" r:embed="R3b37626bfa984f00">
             <a:alphaModFix amt="28000"/>
           </a:blip>
           <a:stretch xmlns:a="http://schemas.openxmlformats.org/drawingml/2006/main"/>
@@ -1664,7 +1664,7 @@
           <p:nvPr/>
         </p:nvPicPr>
         <p:blipFill rotWithShape="1">
-          <a:blip xmlns:r="http://schemas.openxmlformats.org/officeDocument/2006/relationships" xmlns:a="http://schemas.openxmlformats.org/drawingml/2006/main" r:embed="Re5f12fdac23f4f74">
+          <a:blip xmlns:r="http://schemas.openxmlformats.org/officeDocument/2006/relationships" xmlns:a="http://schemas.openxmlformats.org/drawingml/2006/main" r:embed="R63b3452076164aa7">
             <a:alphaModFix amt="28000"/>
           </a:blip>
           <a:stretch xmlns:a="http://schemas.openxmlformats.org/drawingml/2006/main"/>
@@ -1899,7 +1899,7 @@
           <p:nvPr/>
         </p:nvPicPr>
         <p:blipFill rotWithShape="1">
-          <a:blip xmlns:r="http://schemas.openxmlformats.org/officeDocument/2006/relationships" xmlns:a="http://schemas.openxmlformats.org/drawingml/2006/main" r:embed="R84c0ad317ea84c2a">
+          <a:blip xmlns:r="http://schemas.openxmlformats.org/officeDocument/2006/relationships" xmlns:a="http://schemas.openxmlformats.org/drawingml/2006/main" r:embed="R68c72fdb2a304ab1">
             <a:alphaModFix amt="28000"/>
           </a:blip>
           <a:stretch xmlns:a="http://schemas.openxmlformats.org/drawingml/2006/main"/>
@@ -2176,7 +2176,7 @@
           <p:nvPr/>
         </p:nvPicPr>
         <p:blipFill rotWithShape="1">
-          <a:blip xmlns:r="http://schemas.openxmlformats.org/officeDocument/2006/relationships" xmlns:a="http://schemas.openxmlformats.org/drawingml/2006/main" r:embed="Ra0fda1921f49430d">
+          <a:blip xmlns:r="http://schemas.openxmlformats.org/officeDocument/2006/relationships" xmlns:a="http://schemas.openxmlformats.org/drawingml/2006/main" r:embed="Rb5ff9b2c254141f3">
             <a:alphaModFix amt="28000"/>
           </a:blip>
           <a:stretch xmlns:a="http://schemas.openxmlformats.org/drawingml/2006/main"/>
@@ -2451,7 +2451,7 @@
           <p:nvPr/>
         </p:nvPicPr>
         <p:blipFill rotWithShape="1">
-          <a:blip xmlns:r="http://schemas.openxmlformats.org/officeDocument/2006/relationships" xmlns:a="http://schemas.openxmlformats.org/drawingml/2006/main" r:embed="R0400e6f4ff854853">
+          <a:blip xmlns:r="http://schemas.openxmlformats.org/officeDocument/2006/relationships" xmlns:a="http://schemas.openxmlformats.org/drawingml/2006/main" r:embed="Rdba113765861432e">
             <a:alphaModFix amt="28000"/>
           </a:blip>
           <a:stretch xmlns:a="http://schemas.openxmlformats.org/drawingml/2006/main"/>
@@ -2875,7 +2875,7 @@
           <p:nvPr/>
         </p:nvPicPr>
         <p:blipFill rotWithShape="1">
-          <a:blip xmlns:r="http://schemas.openxmlformats.org/officeDocument/2006/relationships" xmlns:a="http://schemas.openxmlformats.org/drawingml/2006/main" r:embed="Rc3412d54b4db44ea">
+          <a:blip xmlns:r="http://schemas.openxmlformats.org/officeDocument/2006/relationships" xmlns:a="http://schemas.openxmlformats.org/drawingml/2006/main" r:embed="Rd6dc48d75b094fce">
             <a:alphaModFix amt="28000"/>
           </a:blip>
           <a:stretch xmlns:a="http://schemas.openxmlformats.org/drawingml/2006/main"/>
@@ -3016,7 +3016,7 @@
           <p:nvPr/>
         </p:nvPicPr>
         <p:blipFill rotWithShape="1">
-          <a:blip xmlns:r="http://schemas.openxmlformats.org/officeDocument/2006/relationships" xmlns:a="http://schemas.openxmlformats.org/drawingml/2006/main" r:embed="R1152ae12cda64add">
+          <a:blip xmlns:r="http://schemas.openxmlformats.org/officeDocument/2006/relationships" xmlns:a="http://schemas.openxmlformats.org/drawingml/2006/main" r:embed="R6359124834f74722">
             <a:alphaModFix amt="28000"/>
           </a:blip>
           <a:stretch xmlns:a="http://schemas.openxmlformats.org/drawingml/2006/main"/>
@@ -3130,7 +3130,7 @@
           <p:nvPr/>
         </p:nvPicPr>
         <p:blipFill rotWithShape="1">
-          <a:blip xmlns:r="http://schemas.openxmlformats.org/officeDocument/2006/relationships" xmlns:a="http://schemas.openxmlformats.org/drawingml/2006/main" r:embed="R904d6468c1054483">
+          <a:blip xmlns:r="http://schemas.openxmlformats.org/officeDocument/2006/relationships" xmlns:a="http://schemas.openxmlformats.org/drawingml/2006/main" r:embed="Re3142d7d772e4849">
             <a:alphaModFix amt="28000"/>
           </a:blip>
           <a:stretch xmlns:a="http://schemas.openxmlformats.org/drawingml/2006/main"/>
@@ -3457,7 +3457,7 @@
           <p:nvPr/>
         </p:nvPicPr>
         <p:blipFill rotWithShape="1">
-          <a:blip xmlns:r="http://schemas.openxmlformats.org/officeDocument/2006/relationships" xmlns:a="http://schemas.openxmlformats.org/drawingml/2006/main" r:embed="R034a894a4d744943">
+          <a:blip xmlns:r="http://schemas.openxmlformats.org/officeDocument/2006/relationships" xmlns:a="http://schemas.openxmlformats.org/drawingml/2006/main" r:embed="Re01190e9536f4102">
             <a:alphaModFix amt="28000"/>
           </a:blip>
           <a:stretch xmlns:a="http://schemas.openxmlformats.org/drawingml/2006/main"/>
@@ -3745,7 +3745,7 @@
           <p:nvPr/>
         </p:nvPicPr>
         <p:blipFill rotWithShape="1">
-          <a:blip xmlns:r="http://schemas.openxmlformats.org/officeDocument/2006/relationships" xmlns:a="http://schemas.openxmlformats.org/drawingml/2006/main" r:embed="Rdbdf2d8effd04906">
+          <a:blip xmlns:r="http://schemas.openxmlformats.org/officeDocument/2006/relationships" xmlns:a="http://schemas.openxmlformats.org/drawingml/2006/main" r:embed="Rb0efb2e09d384c48">
             <a:alphaModFix amt="28000"/>
           </a:blip>
           <a:stretch xmlns:a="http://schemas.openxmlformats.org/drawingml/2006/main"/>
@@ -3982,17 +3982,17 @@
   </p:cSld>
   <p:clrMap bg1="lt1" tx1="dk1" bg2="lt2" tx2="dk2" accent1="accent1" accent2="accent2" accent3="accent3" accent4="accent4" accent5="accent5" accent6="accent6" hlink="hlink" folHlink="folHlink"/>
   <p:sldLayoutIdLst>
-    <p:sldLayoutId xmlns:r="http://schemas.openxmlformats.org/officeDocument/2006/relationships" id="2147483649" r:id="R033366a7254a46cb"/>
-    <p:sldLayoutId xmlns:r="http://schemas.openxmlformats.org/officeDocument/2006/relationships" id="2147483650" r:id="Rbabf9898b33e476c"/>
-    <p:sldLayoutId xmlns:r="http://schemas.openxmlformats.org/officeDocument/2006/relationships" id="2147483651" r:id="R3c3797db66c74ba9"/>
-    <p:sldLayoutId xmlns:r="http://schemas.openxmlformats.org/officeDocument/2006/relationships" id="2147483652" r:id="R85e4df9e36f44260"/>
-    <p:sldLayoutId xmlns:r="http://schemas.openxmlformats.org/officeDocument/2006/relationships" id="2147483653" r:id="R46a9b3de99e74840"/>
-    <p:sldLayoutId xmlns:r="http://schemas.openxmlformats.org/officeDocument/2006/relationships" id="2147483654" r:id="Rcd3c7e4c064a42f4"/>
-    <p:sldLayoutId xmlns:r="http://schemas.openxmlformats.org/officeDocument/2006/relationships" id="2147483655" r:id="Rccd2fd653700448b"/>
-    <p:sldLayoutId xmlns:r="http://schemas.openxmlformats.org/officeDocument/2006/relationships" id="2147483656" r:id="R6feb14ce108b4257"/>
-    <p:sldLayoutId xmlns:r="http://schemas.openxmlformats.org/officeDocument/2006/relationships" id="2147483657" r:id="R5b484012263f4c95"/>
-    <p:sldLayoutId xmlns:r="http://schemas.openxmlformats.org/officeDocument/2006/relationships" id="2147483658" r:id="R6bf9a0ee8d9b45a3"/>
-    <p:sldLayoutId xmlns:r="http://schemas.openxmlformats.org/officeDocument/2006/relationships" id="2147483659" r:id="R81589263e8724db4"/>
+    <p:sldLayoutId xmlns:r="http://schemas.openxmlformats.org/officeDocument/2006/relationships" id="2147483649" r:id="R4973e46be8fb404a"/>
+    <p:sldLayoutId xmlns:r="http://schemas.openxmlformats.org/officeDocument/2006/relationships" id="2147483650" r:id="R9ca87f1529754d84"/>
+    <p:sldLayoutId xmlns:r="http://schemas.openxmlformats.org/officeDocument/2006/relationships" id="2147483651" r:id="R473eaf3ce3cc438c"/>
+    <p:sldLayoutId xmlns:r="http://schemas.openxmlformats.org/officeDocument/2006/relationships" id="2147483652" r:id="R0f4fab2e91134c08"/>
+    <p:sldLayoutId xmlns:r="http://schemas.openxmlformats.org/officeDocument/2006/relationships" id="2147483653" r:id="R30df425f99e44044"/>
+    <p:sldLayoutId xmlns:r="http://schemas.openxmlformats.org/officeDocument/2006/relationships" id="2147483654" r:id="Rf67d523730bf43ba"/>
+    <p:sldLayoutId xmlns:r="http://schemas.openxmlformats.org/officeDocument/2006/relationships" id="2147483655" r:id="R56e8737e17e44401"/>
+    <p:sldLayoutId xmlns:r="http://schemas.openxmlformats.org/officeDocument/2006/relationships" id="2147483656" r:id="R0dfd5d5e6ea541e8"/>
+    <p:sldLayoutId xmlns:r="http://schemas.openxmlformats.org/officeDocument/2006/relationships" id="2147483657" r:id="R8b25bb6f014040e7"/>
+    <p:sldLayoutId xmlns:r="http://schemas.openxmlformats.org/officeDocument/2006/relationships" id="2147483658" r:id="Ra83d441991c34992"/>
+    <p:sldLayoutId xmlns:r="http://schemas.openxmlformats.org/officeDocument/2006/relationships" id="2147483659" r:id="R3d533f8f9cee41ea"/>
   </p:sldLayoutIdLst>
   <p:hf hdr="0" ftr="0" dt="0"/>
   <p:txStyles>

--- a/Mapped Curriculum Lessons/Grade 7/Lesson 16 - Text Length and Lines/Text Length and Lines - Slides.pptx
+++ b/Mapped Curriculum Lessons/Grade 7/Lesson 16 - Text Length and Lines/Text Length and Lines - Slides.pptx
@@ -2,28 +2,28 @@
 <file path=ppt/presentation.xml><?xml version="1.0" encoding="utf-8"?>
 <p:presentation xmlns:p="http://schemas.openxmlformats.org/presentationml/2006/main" embedTrueTypeFonts="1" saveSubsetFonts="0">
   <p:sldMasterIdLst>
-    <p:sldMasterId xmlns:r="http://schemas.openxmlformats.org/officeDocument/2006/relationships" id="2147483648" r:id="R933fe4758cc841e5"/>
+    <p:sldMasterId xmlns:r="http://schemas.openxmlformats.org/officeDocument/2006/relationships" id="2147483648" r:id="Rb995d166824c415d"/>
   </p:sldMasterIdLst>
   <p:notesMasterIdLst>
-    <p:notesMasterId xmlns:r="http://schemas.openxmlformats.org/officeDocument/2006/relationships" r:id="Rf171716d0de646a1"/>
+    <p:notesMasterId xmlns:r="http://schemas.openxmlformats.org/officeDocument/2006/relationships" r:id="R842949b6b45c49aa"/>
   </p:notesMasterIdLst>
   <p:sldIdLst>
-    <p:sldId xmlns:r="http://schemas.openxmlformats.org/officeDocument/2006/relationships" id="256" r:id="R8344b01eef0a445a"/>
-    <p:sldId xmlns:r="http://schemas.openxmlformats.org/officeDocument/2006/relationships" id="257" r:id="Rc342d483906a4593"/>
-    <p:sldId xmlns:r="http://schemas.openxmlformats.org/officeDocument/2006/relationships" id="258" r:id="R972ea0e8f7354ccc"/>
-    <p:sldId xmlns:r="http://schemas.openxmlformats.org/officeDocument/2006/relationships" id="259" r:id="Rb72e90b391b6492b"/>
-    <p:sldId xmlns:r="http://schemas.openxmlformats.org/officeDocument/2006/relationships" id="260" r:id="R89003e577c6e4923"/>
-    <p:sldId xmlns:r="http://schemas.openxmlformats.org/officeDocument/2006/relationships" id="261" r:id="Rb862ae754e2346b0"/>
-    <p:sldId xmlns:r="http://schemas.openxmlformats.org/officeDocument/2006/relationships" id="262" r:id="R7886008d70174255"/>
-    <p:sldId xmlns:r="http://schemas.openxmlformats.org/officeDocument/2006/relationships" id="263" r:id="R80709dff86dd41a3"/>
-    <p:sldId xmlns:r="http://schemas.openxmlformats.org/officeDocument/2006/relationships" id="264" r:id="R57ec703d161e40d9"/>
+    <p:sldId xmlns:r="http://schemas.openxmlformats.org/officeDocument/2006/relationships" id="256" r:id="R75cf4c2d26da4906"/>
+    <p:sldId xmlns:r="http://schemas.openxmlformats.org/officeDocument/2006/relationships" id="257" r:id="R4715f96a276948e2"/>
+    <p:sldId xmlns:r="http://schemas.openxmlformats.org/officeDocument/2006/relationships" id="258" r:id="Rfe8c40fadc1f43e5"/>
+    <p:sldId xmlns:r="http://schemas.openxmlformats.org/officeDocument/2006/relationships" id="259" r:id="R4432190dc5a94975"/>
+    <p:sldId xmlns:r="http://schemas.openxmlformats.org/officeDocument/2006/relationships" id="260" r:id="R1745beefce2b486e"/>
+    <p:sldId xmlns:r="http://schemas.openxmlformats.org/officeDocument/2006/relationships" id="261" r:id="Ref7d3ea75e394d36"/>
+    <p:sldId xmlns:r="http://schemas.openxmlformats.org/officeDocument/2006/relationships" id="262" r:id="Recd189f88ac149a5"/>
+    <p:sldId xmlns:r="http://schemas.openxmlformats.org/officeDocument/2006/relationships" id="263" r:id="Rc6bbb581af384eed"/>
+    <p:sldId xmlns:r="http://schemas.openxmlformats.org/officeDocument/2006/relationships" id="264" r:id="Rd839280ebaea40c9"/>
   </p:sldIdLst>
   <p:sldSz cx="12192000" cy="6858000"/>
   <p:notesSz cx="6858000" cy="9144000"/>
   <p:embeddedFontLst>
     <p:embeddedFont>
       <p:font typeface="JetBrains Mono"/>
-      <p:regular xmlns:r="http://schemas.openxmlformats.org/officeDocument/2006/relationships" r:id="R9d2bc8c8970d45fe"/>
+      <p:regular xmlns:r="http://schemas.openxmlformats.org/officeDocument/2006/relationships" r:id="R5c5f3895f9a140f1"/>
     </p:embeddedFont>
   </p:embeddedFontLst>
 </p:presentation>
@@ -1071,7 +1071,7 @@
           <p:nvPr/>
         </p:nvPicPr>
         <p:blipFill rotWithShape="1">
-          <a:blip xmlns:r="http://schemas.openxmlformats.org/officeDocument/2006/relationships" xmlns:a="http://schemas.openxmlformats.org/drawingml/2006/main" r:embed="Rdf12abf5bdc448e2"/>
+          <a:blip xmlns:r="http://schemas.openxmlformats.org/officeDocument/2006/relationships" xmlns:a="http://schemas.openxmlformats.org/drawingml/2006/main" r:embed="R62e09c7dde464a80"/>
           <a:stretch xmlns:a="http://schemas.openxmlformats.org/drawingml/2006/main"/>
         </p:blipFill>
         <p:spPr>
@@ -1451,7 +1451,7 @@
           <p:nvPr/>
         </p:nvPicPr>
         <p:blipFill rotWithShape="1">
-          <a:blip xmlns:r="http://schemas.openxmlformats.org/officeDocument/2006/relationships" xmlns:a="http://schemas.openxmlformats.org/drawingml/2006/main" r:embed="R3b37626bfa984f00">
+          <a:blip xmlns:r="http://schemas.openxmlformats.org/officeDocument/2006/relationships" xmlns:a="http://schemas.openxmlformats.org/drawingml/2006/main" r:embed="R012a484923094a10">
             <a:alphaModFix amt="28000"/>
           </a:blip>
           <a:stretch xmlns:a="http://schemas.openxmlformats.org/drawingml/2006/main"/>
@@ -1664,7 +1664,7 @@
           <p:nvPr/>
         </p:nvPicPr>
         <p:blipFill rotWithShape="1">
-          <a:blip xmlns:r="http://schemas.openxmlformats.org/officeDocument/2006/relationships" xmlns:a="http://schemas.openxmlformats.org/drawingml/2006/main" r:embed="R63b3452076164aa7">
+          <a:blip xmlns:r="http://schemas.openxmlformats.org/officeDocument/2006/relationships" xmlns:a="http://schemas.openxmlformats.org/drawingml/2006/main" r:embed="Re8818e0a0c3542e1">
             <a:alphaModFix amt="28000"/>
           </a:blip>
           <a:stretch xmlns:a="http://schemas.openxmlformats.org/drawingml/2006/main"/>
@@ -1899,7 +1899,7 @@
           <p:nvPr/>
         </p:nvPicPr>
         <p:blipFill rotWithShape="1">
-          <a:blip xmlns:r="http://schemas.openxmlformats.org/officeDocument/2006/relationships" xmlns:a="http://schemas.openxmlformats.org/drawingml/2006/main" r:embed="R68c72fdb2a304ab1">
+          <a:blip xmlns:r="http://schemas.openxmlformats.org/officeDocument/2006/relationships" xmlns:a="http://schemas.openxmlformats.org/drawingml/2006/main" r:embed="Rb554e88e01984008">
             <a:alphaModFix amt="28000"/>
           </a:blip>
           <a:stretch xmlns:a="http://schemas.openxmlformats.org/drawingml/2006/main"/>
@@ -2176,7 +2176,7 @@
           <p:nvPr/>
         </p:nvPicPr>
         <p:blipFill rotWithShape="1">
-          <a:blip xmlns:r="http://schemas.openxmlformats.org/officeDocument/2006/relationships" xmlns:a="http://schemas.openxmlformats.org/drawingml/2006/main" r:embed="Rb5ff9b2c254141f3">
+          <a:blip xmlns:r="http://schemas.openxmlformats.org/officeDocument/2006/relationships" xmlns:a="http://schemas.openxmlformats.org/drawingml/2006/main" r:embed="R2c8c2d56aab24a45">
             <a:alphaModFix amt="28000"/>
           </a:blip>
           <a:stretch xmlns:a="http://schemas.openxmlformats.org/drawingml/2006/main"/>
@@ -2451,7 +2451,7 @@
           <p:nvPr/>
         </p:nvPicPr>
         <p:blipFill rotWithShape="1">
-          <a:blip xmlns:r="http://schemas.openxmlformats.org/officeDocument/2006/relationships" xmlns:a="http://schemas.openxmlformats.org/drawingml/2006/main" r:embed="Rdba113765861432e">
+          <a:blip xmlns:r="http://schemas.openxmlformats.org/officeDocument/2006/relationships" xmlns:a="http://schemas.openxmlformats.org/drawingml/2006/main" r:embed="Re9af87d084e9437a">
             <a:alphaModFix amt="28000"/>
           </a:blip>
           <a:stretch xmlns:a="http://schemas.openxmlformats.org/drawingml/2006/main"/>
@@ -2875,7 +2875,7 @@
           <p:nvPr/>
         </p:nvPicPr>
         <p:blipFill rotWithShape="1">
-          <a:blip xmlns:r="http://schemas.openxmlformats.org/officeDocument/2006/relationships" xmlns:a="http://schemas.openxmlformats.org/drawingml/2006/main" r:embed="Rd6dc48d75b094fce">
+          <a:blip xmlns:r="http://schemas.openxmlformats.org/officeDocument/2006/relationships" xmlns:a="http://schemas.openxmlformats.org/drawingml/2006/main" r:embed="R2aedc567382e4963">
             <a:alphaModFix amt="28000"/>
           </a:blip>
           <a:stretch xmlns:a="http://schemas.openxmlformats.org/drawingml/2006/main"/>
@@ -3016,7 +3016,7 @@
           <p:nvPr/>
         </p:nvPicPr>
         <p:blipFill rotWithShape="1">
-          <a:blip xmlns:r="http://schemas.openxmlformats.org/officeDocument/2006/relationships" xmlns:a="http://schemas.openxmlformats.org/drawingml/2006/main" r:embed="R6359124834f74722">
+          <a:blip xmlns:r="http://schemas.openxmlformats.org/officeDocument/2006/relationships" xmlns:a="http://schemas.openxmlformats.org/drawingml/2006/main" r:embed="R9da5231f4a57429d">
             <a:alphaModFix amt="28000"/>
           </a:blip>
           <a:stretch xmlns:a="http://schemas.openxmlformats.org/drawingml/2006/main"/>
@@ -3130,7 +3130,7 @@
           <p:nvPr/>
         </p:nvPicPr>
         <p:blipFill rotWithShape="1">
-          <a:blip xmlns:r="http://schemas.openxmlformats.org/officeDocument/2006/relationships" xmlns:a="http://schemas.openxmlformats.org/drawingml/2006/main" r:embed="Re3142d7d772e4849">
+          <a:blip xmlns:r="http://schemas.openxmlformats.org/officeDocument/2006/relationships" xmlns:a="http://schemas.openxmlformats.org/drawingml/2006/main" r:embed="R0e8ae5bac3024cf7">
             <a:alphaModFix amt="28000"/>
           </a:blip>
           <a:stretch xmlns:a="http://schemas.openxmlformats.org/drawingml/2006/main"/>
@@ -3457,7 +3457,7 @@
           <p:nvPr/>
         </p:nvPicPr>
         <p:blipFill rotWithShape="1">
-          <a:blip xmlns:r="http://schemas.openxmlformats.org/officeDocument/2006/relationships" xmlns:a="http://schemas.openxmlformats.org/drawingml/2006/main" r:embed="Re01190e9536f4102">
+          <a:blip xmlns:r="http://schemas.openxmlformats.org/officeDocument/2006/relationships" xmlns:a="http://schemas.openxmlformats.org/drawingml/2006/main" r:embed="Ra1b0fab933484512">
             <a:alphaModFix amt="28000"/>
           </a:blip>
           <a:stretch xmlns:a="http://schemas.openxmlformats.org/drawingml/2006/main"/>
@@ -3745,7 +3745,7 @@
           <p:nvPr/>
         </p:nvPicPr>
         <p:blipFill rotWithShape="1">
-          <a:blip xmlns:r="http://schemas.openxmlformats.org/officeDocument/2006/relationships" xmlns:a="http://schemas.openxmlformats.org/drawingml/2006/main" r:embed="Rb0efb2e09d384c48">
+          <a:blip xmlns:r="http://schemas.openxmlformats.org/officeDocument/2006/relationships" xmlns:a="http://schemas.openxmlformats.org/drawingml/2006/main" r:embed="R9ec3d25c098e4a69">
             <a:alphaModFix amt="28000"/>
           </a:blip>
           <a:stretch xmlns:a="http://schemas.openxmlformats.org/drawingml/2006/main"/>
@@ -3982,17 +3982,17 @@
   </p:cSld>
   <p:clrMap bg1="lt1" tx1="dk1" bg2="lt2" tx2="dk2" accent1="accent1" accent2="accent2" accent3="accent3" accent4="accent4" accent5="accent5" accent6="accent6" hlink="hlink" folHlink="folHlink"/>
   <p:sldLayoutIdLst>
-    <p:sldLayoutId xmlns:r="http://schemas.openxmlformats.org/officeDocument/2006/relationships" id="2147483649" r:id="R4973e46be8fb404a"/>
-    <p:sldLayoutId xmlns:r="http://schemas.openxmlformats.org/officeDocument/2006/relationships" id="2147483650" r:id="R9ca87f1529754d84"/>
-    <p:sldLayoutId xmlns:r="http://schemas.openxmlformats.org/officeDocument/2006/relationships" id="2147483651" r:id="R473eaf3ce3cc438c"/>
-    <p:sldLayoutId xmlns:r="http://schemas.openxmlformats.org/officeDocument/2006/relationships" id="2147483652" r:id="R0f4fab2e91134c08"/>
-    <p:sldLayoutId xmlns:r="http://schemas.openxmlformats.org/officeDocument/2006/relationships" id="2147483653" r:id="R30df425f99e44044"/>
-    <p:sldLayoutId xmlns:r="http://schemas.openxmlformats.org/officeDocument/2006/relationships" id="2147483654" r:id="Rf67d523730bf43ba"/>
-    <p:sldLayoutId xmlns:r="http://schemas.openxmlformats.org/officeDocument/2006/relationships" id="2147483655" r:id="R56e8737e17e44401"/>
-    <p:sldLayoutId xmlns:r="http://schemas.openxmlformats.org/officeDocument/2006/relationships" id="2147483656" r:id="R0dfd5d5e6ea541e8"/>
-    <p:sldLayoutId xmlns:r="http://schemas.openxmlformats.org/officeDocument/2006/relationships" id="2147483657" r:id="R8b25bb6f014040e7"/>
-    <p:sldLayoutId xmlns:r="http://schemas.openxmlformats.org/officeDocument/2006/relationships" id="2147483658" r:id="Ra83d441991c34992"/>
-    <p:sldLayoutId xmlns:r="http://schemas.openxmlformats.org/officeDocument/2006/relationships" id="2147483659" r:id="R3d533f8f9cee41ea"/>
+    <p:sldLayoutId xmlns:r="http://schemas.openxmlformats.org/officeDocument/2006/relationships" id="2147483649" r:id="R11345ec7bf5541f5"/>
+    <p:sldLayoutId xmlns:r="http://schemas.openxmlformats.org/officeDocument/2006/relationships" id="2147483650" r:id="Rbf86fa505b324ee4"/>
+    <p:sldLayoutId xmlns:r="http://schemas.openxmlformats.org/officeDocument/2006/relationships" id="2147483651" r:id="Rc996250453684492"/>
+    <p:sldLayoutId xmlns:r="http://schemas.openxmlformats.org/officeDocument/2006/relationships" id="2147483652" r:id="R3c8babc975604ffe"/>
+    <p:sldLayoutId xmlns:r="http://schemas.openxmlformats.org/officeDocument/2006/relationships" id="2147483653" r:id="Rb2273e21bdc447d2"/>
+    <p:sldLayoutId xmlns:r="http://schemas.openxmlformats.org/officeDocument/2006/relationships" id="2147483654" r:id="R72b19417700a42c5"/>
+    <p:sldLayoutId xmlns:r="http://schemas.openxmlformats.org/officeDocument/2006/relationships" id="2147483655" r:id="R71cfe7c9201343bd"/>
+    <p:sldLayoutId xmlns:r="http://schemas.openxmlformats.org/officeDocument/2006/relationships" id="2147483656" r:id="R21b54ab161b64bba"/>
+    <p:sldLayoutId xmlns:r="http://schemas.openxmlformats.org/officeDocument/2006/relationships" id="2147483657" r:id="R16c31ed705244ffa"/>
+    <p:sldLayoutId xmlns:r="http://schemas.openxmlformats.org/officeDocument/2006/relationships" id="2147483658" r:id="Re4df8eb2449d497c"/>
+    <p:sldLayoutId xmlns:r="http://schemas.openxmlformats.org/officeDocument/2006/relationships" id="2147483659" r:id="Rd94e754f40fe4d41"/>
   </p:sldLayoutIdLst>
   <p:hf hdr="0" ftr="0" dt="0"/>
   <p:txStyles>

--- a/Mapped Curriculum Lessons/Grade 7/Lesson 16 - Text Length and Lines/Text Length and Lines - Slides.pptx
+++ b/Mapped Curriculum Lessons/Grade 7/Lesson 16 - Text Length and Lines/Text Length and Lines - Slides.pptx
@@ -2,28 +2,28 @@
 <file path=ppt/presentation.xml><?xml version="1.0" encoding="utf-8"?>
 <p:presentation xmlns:p="http://schemas.openxmlformats.org/presentationml/2006/main" embedTrueTypeFonts="1" saveSubsetFonts="0">
   <p:sldMasterIdLst>
-    <p:sldMasterId xmlns:r="http://schemas.openxmlformats.org/officeDocument/2006/relationships" id="2147483648" r:id="Rb995d166824c415d"/>
+    <p:sldMasterId xmlns:r="http://schemas.openxmlformats.org/officeDocument/2006/relationships" id="2147483648" r:id="R161df10cf064471b"/>
   </p:sldMasterIdLst>
   <p:notesMasterIdLst>
-    <p:notesMasterId xmlns:r="http://schemas.openxmlformats.org/officeDocument/2006/relationships" r:id="R842949b6b45c49aa"/>
+    <p:notesMasterId xmlns:r="http://schemas.openxmlformats.org/officeDocument/2006/relationships" r:id="Rb38577e14d4547b9"/>
   </p:notesMasterIdLst>
   <p:sldIdLst>
-    <p:sldId xmlns:r="http://schemas.openxmlformats.org/officeDocument/2006/relationships" id="256" r:id="R75cf4c2d26da4906"/>
-    <p:sldId xmlns:r="http://schemas.openxmlformats.org/officeDocument/2006/relationships" id="257" r:id="R4715f96a276948e2"/>
-    <p:sldId xmlns:r="http://schemas.openxmlformats.org/officeDocument/2006/relationships" id="258" r:id="Rfe8c40fadc1f43e5"/>
-    <p:sldId xmlns:r="http://schemas.openxmlformats.org/officeDocument/2006/relationships" id="259" r:id="R4432190dc5a94975"/>
-    <p:sldId xmlns:r="http://schemas.openxmlformats.org/officeDocument/2006/relationships" id="260" r:id="R1745beefce2b486e"/>
-    <p:sldId xmlns:r="http://schemas.openxmlformats.org/officeDocument/2006/relationships" id="261" r:id="Ref7d3ea75e394d36"/>
-    <p:sldId xmlns:r="http://schemas.openxmlformats.org/officeDocument/2006/relationships" id="262" r:id="Recd189f88ac149a5"/>
-    <p:sldId xmlns:r="http://schemas.openxmlformats.org/officeDocument/2006/relationships" id="263" r:id="Rc6bbb581af384eed"/>
-    <p:sldId xmlns:r="http://schemas.openxmlformats.org/officeDocument/2006/relationships" id="264" r:id="Rd839280ebaea40c9"/>
+    <p:sldId xmlns:r="http://schemas.openxmlformats.org/officeDocument/2006/relationships" id="256" r:id="R830c84a4ad16497a"/>
+    <p:sldId xmlns:r="http://schemas.openxmlformats.org/officeDocument/2006/relationships" id="257" r:id="Race767261ec540c9"/>
+    <p:sldId xmlns:r="http://schemas.openxmlformats.org/officeDocument/2006/relationships" id="258" r:id="Rf607bb8bce91455a"/>
+    <p:sldId xmlns:r="http://schemas.openxmlformats.org/officeDocument/2006/relationships" id="259" r:id="R6bf56d3684bf441c"/>
+    <p:sldId xmlns:r="http://schemas.openxmlformats.org/officeDocument/2006/relationships" id="260" r:id="R4c112311bc4e4dda"/>
+    <p:sldId xmlns:r="http://schemas.openxmlformats.org/officeDocument/2006/relationships" id="261" r:id="R8547d413c9f745ae"/>
+    <p:sldId xmlns:r="http://schemas.openxmlformats.org/officeDocument/2006/relationships" id="262" r:id="Rdbfa49528ddf47f8"/>
+    <p:sldId xmlns:r="http://schemas.openxmlformats.org/officeDocument/2006/relationships" id="263" r:id="R2d35010bc8264ef6"/>
+    <p:sldId xmlns:r="http://schemas.openxmlformats.org/officeDocument/2006/relationships" id="264" r:id="R5b1a5b6fb94040ba"/>
   </p:sldIdLst>
   <p:sldSz cx="12192000" cy="6858000"/>
   <p:notesSz cx="6858000" cy="9144000"/>
   <p:embeddedFontLst>
     <p:embeddedFont>
       <p:font typeface="JetBrains Mono"/>
-      <p:regular xmlns:r="http://schemas.openxmlformats.org/officeDocument/2006/relationships" r:id="R5c5f3895f9a140f1"/>
+      <p:regular xmlns:r="http://schemas.openxmlformats.org/officeDocument/2006/relationships" r:id="R2c62a16784814a32"/>
     </p:embeddedFont>
   </p:embeddedFontLst>
 </p:presentation>
@@ -1071,7 +1071,7 @@
           <p:nvPr/>
         </p:nvPicPr>
         <p:blipFill rotWithShape="1">
-          <a:blip xmlns:r="http://schemas.openxmlformats.org/officeDocument/2006/relationships" xmlns:a="http://schemas.openxmlformats.org/drawingml/2006/main" r:embed="R62e09c7dde464a80"/>
+          <a:blip xmlns:r="http://schemas.openxmlformats.org/officeDocument/2006/relationships" xmlns:a="http://schemas.openxmlformats.org/drawingml/2006/main" r:embed="R22695928d4b7493d"/>
           <a:stretch xmlns:a="http://schemas.openxmlformats.org/drawingml/2006/main"/>
         </p:blipFill>
         <p:spPr>
@@ -1451,7 +1451,7 @@
           <p:nvPr/>
         </p:nvPicPr>
         <p:blipFill rotWithShape="1">
-          <a:blip xmlns:r="http://schemas.openxmlformats.org/officeDocument/2006/relationships" xmlns:a="http://schemas.openxmlformats.org/drawingml/2006/main" r:embed="R012a484923094a10">
+          <a:blip xmlns:r="http://schemas.openxmlformats.org/officeDocument/2006/relationships" xmlns:a="http://schemas.openxmlformats.org/drawingml/2006/main" r:embed="Ra7484631428c48c0">
             <a:alphaModFix amt="28000"/>
           </a:blip>
           <a:stretch xmlns:a="http://schemas.openxmlformats.org/drawingml/2006/main"/>
@@ -1664,7 +1664,7 @@
           <p:nvPr/>
         </p:nvPicPr>
         <p:blipFill rotWithShape="1">
-          <a:blip xmlns:r="http://schemas.openxmlformats.org/officeDocument/2006/relationships" xmlns:a="http://schemas.openxmlformats.org/drawingml/2006/main" r:embed="Re8818e0a0c3542e1">
+          <a:blip xmlns:r="http://schemas.openxmlformats.org/officeDocument/2006/relationships" xmlns:a="http://schemas.openxmlformats.org/drawingml/2006/main" r:embed="R264717d3d9134ed8">
             <a:alphaModFix amt="28000"/>
           </a:blip>
           <a:stretch xmlns:a="http://schemas.openxmlformats.org/drawingml/2006/main"/>
@@ -1899,7 +1899,7 @@
           <p:nvPr/>
         </p:nvPicPr>
         <p:blipFill rotWithShape="1">
-          <a:blip xmlns:r="http://schemas.openxmlformats.org/officeDocument/2006/relationships" xmlns:a="http://schemas.openxmlformats.org/drawingml/2006/main" r:embed="Rb554e88e01984008">
+          <a:blip xmlns:r="http://schemas.openxmlformats.org/officeDocument/2006/relationships" xmlns:a="http://schemas.openxmlformats.org/drawingml/2006/main" r:embed="Rad164afe73ec4566">
             <a:alphaModFix amt="28000"/>
           </a:blip>
           <a:stretch xmlns:a="http://schemas.openxmlformats.org/drawingml/2006/main"/>
@@ -2176,7 +2176,7 @@
           <p:nvPr/>
         </p:nvPicPr>
         <p:blipFill rotWithShape="1">
-          <a:blip xmlns:r="http://schemas.openxmlformats.org/officeDocument/2006/relationships" xmlns:a="http://schemas.openxmlformats.org/drawingml/2006/main" r:embed="R2c8c2d56aab24a45">
+          <a:blip xmlns:r="http://schemas.openxmlformats.org/officeDocument/2006/relationships" xmlns:a="http://schemas.openxmlformats.org/drawingml/2006/main" r:embed="R466d44ea68b84d09">
             <a:alphaModFix amt="28000"/>
           </a:blip>
           <a:stretch xmlns:a="http://schemas.openxmlformats.org/drawingml/2006/main"/>
@@ -2451,7 +2451,7 @@
           <p:nvPr/>
         </p:nvPicPr>
         <p:blipFill rotWithShape="1">
-          <a:blip xmlns:r="http://schemas.openxmlformats.org/officeDocument/2006/relationships" xmlns:a="http://schemas.openxmlformats.org/drawingml/2006/main" r:embed="Re9af87d084e9437a">
+          <a:blip xmlns:r="http://schemas.openxmlformats.org/officeDocument/2006/relationships" xmlns:a="http://schemas.openxmlformats.org/drawingml/2006/main" r:embed="Rf1a3e5a23ab0471e">
             <a:alphaModFix amt="28000"/>
           </a:blip>
           <a:stretch xmlns:a="http://schemas.openxmlformats.org/drawingml/2006/main"/>
@@ -2875,7 +2875,7 @@
           <p:nvPr/>
         </p:nvPicPr>
         <p:blipFill rotWithShape="1">
-          <a:blip xmlns:r="http://schemas.openxmlformats.org/officeDocument/2006/relationships" xmlns:a="http://schemas.openxmlformats.org/drawingml/2006/main" r:embed="R2aedc567382e4963">
+          <a:blip xmlns:r="http://schemas.openxmlformats.org/officeDocument/2006/relationships" xmlns:a="http://schemas.openxmlformats.org/drawingml/2006/main" r:embed="Re774371b8e914c75">
             <a:alphaModFix amt="28000"/>
           </a:blip>
           <a:stretch xmlns:a="http://schemas.openxmlformats.org/drawingml/2006/main"/>
@@ -3016,7 +3016,7 @@
           <p:nvPr/>
         </p:nvPicPr>
         <p:blipFill rotWithShape="1">
-          <a:blip xmlns:r="http://schemas.openxmlformats.org/officeDocument/2006/relationships" xmlns:a="http://schemas.openxmlformats.org/drawingml/2006/main" r:embed="R9da5231f4a57429d">
+          <a:blip xmlns:r="http://schemas.openxmlformats.org/officeDocument/2006/relationships" xmlns:a="http://schemas.openxmlformats.org/drawingml/2006/main" r:embed="R476d11eac3d844ab">
             <a:alphaModFix amt="28000"/>
           </a:blip>
           <a:stretch xmlns:a="http://schemas.openxmlformats.org/drawingml/2006/main"/>
@@ -3130,7 +3130,7 @@
           <p:nvPr/>
         </p:nvPicPr>
         <p:blipFill rotWithShape="1">
-          <a:blip xmlns:r="http://schemas.openxmlformats.org/officeDocument/2006/relationships" xmlns:a="http://schemas.openxmlformats.org/drawingml/2006/main" r:embed="R0e8ae5bac3024cf7">
+          <a:blip xmlns:r="http://schemas.openxmlformats.org/officeDocument/2006/relationships" xmlns:a="http://schemas.openxmlformats.org/drawingml/2006/main" r:embed="Rc6790494253544ca">
             <a:alphaModFix amt="28000"/>
           </a:blip>
           <a:stretch xmlns:a="http://schemas.openxmlformats.org/drawingml/2006/main"/>
@@ -3457,7 +3457,7 @@
           <p:nvPr/>
         </p:nvPicPr>
         <p:blipFill rotWithShape="1">
-          <a:blip xmlns:r="http://schemas.openxmlformats.org/officeDocument/2006/relationships" xmlns:a="http://schemas.openxmlformats.org/drawingml/2006/main" r:embed="Ra1b0fab933484512">
+          <a:blip xmlns:r="http://schemas.openxmlformats.org/officeDocument/2006/relationships" xmlns:a="http://schemas.openxmlformats.org/drawingml/2006/main" r:embed="Rba6636d7caf3431f">
             <a:alphaModFix amt="28000"/>
           </a:blip>
           <a:stretch xmlns:a="http://schemas.openxmlformats.org/drawingml/2006/main"/>
@@ -3745,7 +3745,7 @@
           <p:nvPr/>
         </p:nvPicPr>
         <p:blipFill rotWithShape="1">
-          <a:blip xmlns:r="http://schemas.openxmlformats.org/officeDocument/2006/relationships" xmlns:a="http://schemas.openxmlformats.org/drawingml/2006/main" r:embed="R9ec3d25c098e4a69">
+          <a:blip xmlns:r="http://schemas.openxmlformats.org/officeDocument/2006/relationships" xmlns:a="http://schemas.openxmlformats.org/drawingml/2006/main" r:embed="Ra398c8a2532e4e22">
             <a:alphaModFix amt="28000"/>
           </a:blip>
           <a:stretch xmlns:a="http://schemas.openxmlformats.org/drawingml/2006/main"/>
@@ -3982,17 +3982,17 @@
   </p:cSld>
   <p:clrMap bg1="lt1" tx1="dk1" bg2="lt2" tx2="dk2" accent1="accent1" accent2="accent2" accent3="accent3" accent4="accent4" accent5="accent5" accent6="accent6" hlink="hlink" folHlink="folHlink"/>
   <p:sldLayoutIdLst>
-    <p:sldLayoutId xmlns:r="http://schemas.openxmlformats.org/officeDocument/2006/relationships" id="2147483649" r:id="R11345ec7bf5541f5"/>
-    <p:sldLayoutId xmlns:r="http://schemas.openxmlformats.org/officeDocument/2006/relationships" id="2147483650" r:id="Rbf86fa505b324ee4"/>
-    <p:sldLayoutId xmlns:r="http://schemas.openxmlformats.org/officeDocument/2006/relationships" id="2147483651" r:id="Rc996250453684492"/>
-    <p:sldLayoutId xmlns:r="http://schemas.openxmlformats.org/officeDocument/2006/relationships" id="2147483652" r:id="R3c8babc975604ffe"/>
-    <p:sldLayoutId xmlns:r="http://schemas.openxmlformats.org/officeDocument/2006/relationships" id="2147483653" r:id="Rb2273e21bdc447d2"/>
-    <p:sldLayoutId xmlns:r="http://schemas.openxmlformats.org/officeDocument/2006/relationships" id="2147483654" r:id="R72b19417700a42c5"/>
-    <p:sldLayoutId xmlns:r="http://schemas.openxmlformats.org/officeDocument/2006/relationships" id="2147483655" r:id="R71cfe7c9201343bd"/>
-    <p:sldLayoutId xmlns:r="http://schemas.openxmlformats.org/officeDocument/2006/relationships" id="2147483656" r:id="R21b54ab161b64bba"/>
-    <p:sldLayoutId xmlns:r="http://schemas.openxmlformats.org/officeDocument/2006/relationships" id="2147483657" r:id="R16c31ed705244ffa"/>
-    <p:sldLayoutId xmlns:r="http://schemas.openxmlformats.org/officeDocument/2006/relationships" id="2147483658" r:id="Re4df8eb2449d497c"/>
-    <p:sldLayoutId xmlns:r="http://schemas.openxmlformats.org/officeDocument/2006/relationships" id="2147483659" r:id="Rd94e754f40fe4d41"/>
+    <p:sldLayoutId xmlns:r="http://schemas.openxmlformats.org/officeDocument/2006/relationships" id="2147483649" r:id="R723e3e4e2a2c4b45"/>
+    <p:sldLayoutId xmlns:r="http://schemas.openxmlformats.org/officeDocument/2006/relationships" id="2147483650" r:id="R4c3fcee08de44065"/>
+    <p:sldLayoutId xmlns:r="http://schemas.openxmlformats.org/officeDocument/2006/relationships" id="2147483651" r:id="Rda9ac6bca1ae4961"/>
+    <p:sldLayoutId xmlns:r="http://schemas.openxmlformats.org/officeDocument/2006/relationships" id="2147483652" r:id="Ra07b0ceeffd54d13"/>
+    <p:sldLayoutId xmlns:r="http://schemas.openxmlformats.org/officeDocument/2006/relationships" id="2147483653" r:id="Rfc974d63042642a0"/>
+    <p:sldLayoutId xmlns:r="http://schemas.openxmlformats.org/officeDocument/2006/relationships" id="2147483654" r:id="R70a786e571944b29"/>
+    <p:sldLayoutId xmlns:r="http://schemas.openxmlformats.org/officeDocument/2006/relationships" id="2147483655" r:id="R8514a18295934624"/>
+    <p:sldLayoutId xmlns:r="http://schemas.openxmlformats.org/officeDocument/2006/relationships" id="2147483656" r:id="Recf29d233b5d489d"/>
+    <p:sldLayoutId xmlns:r="http://schemas.openxmlformats.org/officeDocument/2006/relationships" id="2147483657" r:id="R2d1499d4630c48ab"/>
+    <p:sldLayoutId xmlns:r="http://schemas.openxmlformats.org/officeDocument/2006/relationships" id="2147483658" r:id="R4cfafeb2613d40f4"/>
+    <p:sldLayoutId xmlns:r="http://schemas.openxmlformats.org/officeDocument/2006/relationships" id="2147483659" r:id="R4764b8ca74414476"/>
   </p:sldLayoutIdLst>
   <p:hf hdr="0" ftr="0" dt="0"/>
   <p:txStyles>
